--- a/2026 WTSC/figures/protocol.pptx
+++ b/2026 WTSC/figures/protocol.pptx
@@ -3340,12 +3340,12 @@
         </p:nvSpPr>
         <p:spPr>
           <a:xfrm>
-            <a:off x="1283388" y="483101"/>
-            <a:ext cx="2007197" cy="1449871"/>
+            <a:off x="30536" y="208142"/>
+            <a:ext cx="2355946" cy="1243846"/>
           </a:xfrm>
           <a:prstGeom prst="roundRect">
             <a:avLst>
-              <a:gd name="adj" fmla="val 2505"/>
+              <a:gd name="adj" fmla="val 3202"/>
             </a:avLst>
           </a:prstGeom>
           <a:solidFill>
@@ -3353,10 +3353,10 @@
               <a:alpha val="12157"/>
             </a:srgbClr>
           </a:solidFill>
-          <a:ln w="9525">
+          <a:ln w="6350">
             <a:solidFill>
               <a:schemeClr val="bg1">
-                <a:lumMod val="65000"/>
+                <a:lumMod val="50000"/>
               </a:schemeClr>
             </a:solidFill>
             <a:prstDash val="dash"/>
@@ -3401,8 +3401,58 @@
         </p:nvSpPr>
         <p:spPr>
           <a:xfrm>
-            <a:off x="1442925" y="367685"/>
-            <a:ext cx="1688122" cy="230832"/>
+            <a:off x="555481" y="115808"/>
+            <a:ext cx="1306054" cy="184666"/>
+          </a:xfrm>
+          <a:prstGeom prst="rect">
+            <a:avLst/>
+          </a:prstGeom>
+          <a:solidFill>
+            <a:schemeClr val="bg1"/>
+          </a:solidFill>
+          <a:ln w="6350">
+            <a:solidFill>
+              <a:schemeClr val="tx1"/>
+            </a:solidFill>
+          </a:ln>
+        </p:spPr>
+        <p:txBody>
+          <a:bodyPr wrap="square" rtlCol="0">
+            <a:spAutoFit/>
+          </a:bodyPr>
+          <a:lstStyle/>
+          <a:p>
+            <a:pPr algn="ctr"/>
+            <a:r>
+              <a:rPr lang="en-US" sz="600" b="1" dirty="0">
+                <a:latin typeface="NewComputerModern08" pitchFamily="2" charset="77"/>
+                <a:cs typeface="Times New Roman" panose="02020603050405020304" pitchFamily="18" charset="0"/>
+              </a:rPr>
+              <a:t>Election Setup</a:t>
+            </a:r>
+            <a:endParaRPr lang="en-US" sz="1050" b="1" dirty="0">
+              <a:latin typeface="NewComputerModern08" pitchFamily="2" charset="77"/>
+              <a:cs typeface="Times New Roman" panose="02020603050405020304" pitchFamily="18" charset="0"/>
+            </a:endParaRPr>
+          </a:p>
+        </p:txBody>
+      </p:sp>
+      <p:sp>
+        <p:nvSpPr>
+          <p:cNvPr id="3" name="TextBox 2">
+            <a:extLst>
+              <a:ext uri="{FF2B5EF4-FFF2-40B4-BE49-F238E27FC236}">
+                <a16:creationId xmlns:a16="http://schemas.microsoft.com/office/drawing/2014/main" id="{3EEFBD6E-1174-EE3E-CD25-C36AD851B410}"/>
+              </a:ext>
+            </a:extLst>
+          </p:cNvPr>
+          <p:cNvSpPr txBox="1"/>
+          <p:nvPr/>
+        </p:nvSpPr>
+        <p:spPr>
+          <a:xfrm>
+            <a:off x="171210" y="384261"/>
+            <a:ext cx="2074596" cy="369332"/>
           </a:xfrm>
           <a:prstGeom prst="rect">
             <a:avLst/>
@@ -3422,27 +3472,620 @@
           </a:bodyPr>
           <a:lstStyle/>
           <a:p>
-            <a:pPr algn="ctr"/>
-            <a:r>
-              <a:rPr lang="en-US" sz="900" dirty="0">
+            <a:pPr marL="228600" indent="-228600">
+              <a:buFont typeface="+mj-lt"/>
+              <a:buAutoNum type="arabicPeriod"/>
+            </a:pPr>
+            <a:r>
+              <a:rPr lang="en-US" sz="600" dirty="0">
                 <a:latin typeface="NewComputerModern08" pitchFamily="2" charset="77"/>
                 <a:cs typeface="Times New Roman" panose="02020603050405020304" pitchFamily="18" charset="0"/>
               </a:rPr>
-              <a:t>Setup</a:t>
-            </a:r>
-            <a:endParaRPr lang="en-US" sz="1400" dirty="0">
-              <a:latin typeface="NewComputerModern08" pitchFamily="2" charset="77"/>
-              <a:cs typeface="Times New Roman" panose="02020603050405020304" pitchFamily="18" charset="0"/>
+              <a:t>Generate ballot IDs and confirmation codes</a:t>
+            </a:r>
+          </a:p>
+          <a:p>
+            <a:pPr marL="228600" indent="-228600">
+              <a:buFont typeface="+mj-lt"/>
+              <a:buAutoNum type="arabicPeriod"/>
+            </a:pPr>
+            <a:r>
+              <a:rPr lang="en-US" sz="600" dirty="0">
+                <a:latin typeface="NewComputerModern08" pitchFamily="2" charset="77"/>
+                <a:cs typeface="Times New Roman" panose="02020603050405020304" pitchFamily="18" charset="0"/>
+              </a:rPr>
+              <a:t>Initialize table layout (grouped by ballot ID)</a:t>
+            </a:r>
+          </a:p>
+          <a:p>
+            <a:pPr marL="228600" indent="-228600">
+              <a:buFont typeface="+mj-lt"/>
+              <a:buAutoNum type="arabicPeriod"/>
+            </a:pPr>
+            <a:r>
+              <a:rPr lang="en-US" sz="600" dirty="0">
+                <a:latin typeface="NewComputerModern08" pitchFamily="2" charset="77"/>
+                <a:cs typeface="Times New Roman" panose="02020603050405020304" pitchFamily="18" charset="0"/>
+              </a:rPr>
+              <a:t>Initialize mark status, audit status to False</a:t>
+            </a:r>
+          </a:p>
+        </p:txBody>
+      </p:sp>
+      <p:sp>
+        <p:nvSpPr>
+          <p:cNvPr id="6" name="Rectangle 5">
+            <a:extLst>
+              <a:ext uri="{FF2B5EF4-FFF2-40B4-BE49-F238E27FC236}">
+                <a16:creationId xmlns:a16="http://schemas.microsoft.com/office/drawing/2014/main" id="{FDF1EF41-EA21-B2C1-957F-8D71009527DF}"/>
+              </a:ext>
+            </a:extLst>
+          </p:cNvPr>
+          <p:cNvSpPr/>
+          <p:nvPr/>
+        </p:nvSpPr>
+        <p:spPr>
+          <a:xfrm>
+            <a:off x="2" y="0"/>
+            <a:ext cx="4746169" cy="6858000"/>
+          </a:xfrm>
+          <a:prstGeom prst="rect">
+            <a:avLst/>
+          </a:prstGeom>
+          <a:noFill/>
+          <a:ln w="3175"/>
+        </p:spPr>
+        <p:style>
+          <a:lnRef idx="2">
+            <a:schemeClr val="accent1">
+              <a:shade val="15000"/>
+            </a:schemeClr>
+          </a:lnRef>
+          <a:fillRef idx="1">
+            <a:schemeClr val="accent1"/>
+          </a:fillRef>
+          <a:effectRef idx="0">
+            <a:schemeClr val="accent1"/>
+          </a:effectRef>
+          <a:fontRef idx="minor">
+            <a:schemeClr val="lt1"/>
+          </a:fontRef>
+        </p:style>
+        <p:txBody>
+          <a:bodyPr rtlCol="0" anchor="ctr"/>
+          <a:lstStyle/>
+          <a:p>
+            <a:pPr algn="ctr"/>
+            <a:endParaRPr lang="en-US"/>
+          </a:p>
+        </p:txBody>
+      </p:sp>
+      <p:sp>
+        <p:nvSpPr>
+          <p:cNvPr id="11" name="Rounded Rectangle 10">
+            <a:extLst>
+              <a:ext uri="{FF2B5EF4-FFF2-40B4-BE49-F238E27FC236}">
+                <a16:creationId xmlns:a16="http://schemas.microsoft.com/office/drawing/2014/main" id="{BD9D0F1A-921D-036B-1093-2C112C4D30EB}"/>
+              </a:ext>
+            </a:extLst>
+          </p:cNvPr>
+          <p:cNvSpPr/>
+          <p:nvPr/>
+        </p:nvSpPr>
+        <p:spPr>
+          <a:xfrm>
+            <a:off x="2520339" y="320107"/>
+            <a:ext cx="2195192" cy="145267"/>
+          </a:xfrm>
+          <a:prstGeom prst="roundRect">
+            <a:avLst>
+              <a:gd name="adj" fmla="val 0"/>
+            </a:avLst>
+          </a:prstGeom>
+          <a:solidFill>
+            <a:srgbClr val="FFCF63">
+              <a:alpha val="32941"/>
+            </a:srgbClr>
+          </a:solidFill>
+          <a:ln w="6350">
+            <a:solidFill>
+              <a:schemeClr val="tx1">
+                <a:lumMod val="50000"/>
+                <a:lumOff val="50000"/>
+              </a:schemeClr>
+            </a:solidFill>
+            <a:prstDash val="solid"/>
+          </a:ln>
+        </p:spPr>
+        <p:style>
+          <a:lnRef idx="2">
+            <a:schemeClr val="accent1">
+              <a:shade val="15000"/>
+            </a:schemeClr>
+          </a:lnRef>
+          <a:fillRef idx="1">
+            <a:schemeClr val="accent1"/>
+          </a:fillRef>
+          <a:effectRef idx="0">
+            <a:schemeClr val="accent1"/>
+          </a:effectRef>
+          <a:fontRef idx="minor">
+            <a:schemeClr val="lt1"/>
+          </a:fontRef>
+        </p:style>
+        <p:txBody>
+          <a:bodyPr rtlCol="0" anchor="ctr"/>
+          <a:lstStyle/>
+          <a:p>
+            <a:pPr algn="ctr"/>
+            <a:r>
+              <a:rPr lang="en-US" sz="600" b="1" dirty="0">
+                <a:solidFill>
+                  <a:schemeClr val="tx1"/>
+                </a:solidFill>
+                <a:latin typeface="NewComputerModern08" pitchFamily="2" charset="77"/>
+                <a:cs typeface="Times New Roman" panose="02020603050405020304" pitchFamily="18" charset="0"/>
+              </a:rPr>
+              <a:t>Election Parameters</a:t>
+            </a:r>
+            <a:endParaRPr lang="en-US" sz="1400" b="1" dirty="0">
+              <a:solidFill>
+                <a:schemeClr val="tx1"/>
+              </a:solidFill>
             </a:endParaRPr>
           </a:p>
         </p:txBody>
       </p:sp>
       <p:sp>
         <p:nvSpPr>
-          <p:cNvPr id="3" name="TextBox 2">
-            <a:extLst>
-              <a:ext uri="{FF2B5EF4-FFF2-40B4-BE49-F238E27FC236}">
-                <a16:creationId xmlns:a16="http://schemas.microsoft.com/office/drawing/2014/main" id="{3EEFBD6E-1174-EE3E-CD25-C36AD851B410}"/>
+          <p:cNvPr id="15" name="Rounded Rectangle 14">
+            <a:extLst>
+              <a:ext uri="{FF2B5EF4-FFF2-40B4-BE49-F238E27FC236}">
+                <a16:creationId xmlns:a16="http://schemas.microsoft.com/office/drawing/2014/main" id="{235FB280-A62E-7A57-2D03-8437AB8C72DA}"/>
+              </a:ext>
+            </a:extLst>
+          </p:cNvPr>
+          <p:cNvSpPr/>
+          <p:nvPr/>
+        </p:nvSpPr>
+        <p:spPr>
+          <a:xfrm>
+            <a:off x="2520338" y="465374"/>
+            <a:ext cx="2195192" cy="208141"/>
+          </a:xfrm>
+          <a:prstGeom prst="roundRect">
+            <a:avLst>
+              <a:gd name="adj" fmla="val 0"/>
+            </a:avLst>
+          </a:prstGeom>
+          <a:solidFill>
+            <a:srgbClr val="91AEFF">
+              <a:alpha val="16078"/>
+            </a:srgbClr>
+          </a:solidFill>
+          <a:ln w="6350">
+            <a:solidFill>
+              <a:schemeClr val="tx1">
+                <a:lumMod val="50000"/>
+                <a:lumOff val="50000"/>
+              </a:schemeClr>
+            </a:solidFill>
+            <a:prstDash val="solid"/>
+          </a:ln>
+        </p:spPr>
+        <p:style>
+          <a:lnRef idx="2">
+            <a:schemeClr val="accent1">
+              <a:shade val="15000"/>
+            </a:schemeClr>
+          </a:lnRef>
+          <a:fillRef idx="1">
+            <a:schemeClr val="accent1"/>
+          </a:fillRef>
+          <a:effectRef idx="0">
+            <a:schemeClr val="accent1"/>
+          </a:effectRef>
+          <a:fontRef idx="minor">
+            <a:schemeClr val="lt1"/>
+          </a:fontRef>
+        </p:style>
+        <p:txBody>
+          <a:bodyPr rtlCol="0" anchor="ctr"/>
+          <a:lstStyle/>
+          <a:p>
+            <a:pPr algn="ctr"/>
+            <a:r>
+              <a:rPr lang="en-US" sz="600" dirty="0">
+                <a:solidFill>
+                  <a:schemeClr val="tx1"/>
+                </a:solidFill>
+                <a:latin typeface="NewComputerModern08" pitchFamily="2" charset="77"/>
+                <a:cs typeface="Times New Roman" panose="02020603050405020304" pitchFamily="18" charset="0"/>
+              </a:rPr>
+              <a:t>B ballots, C candidates, P mark positions</a:t>
+            </a:r>
+          </a:p>
+        </p:txBody>
+      </p:sp>
+      <p:sp>
+        <p:nvSpPr>
+          <p:cNvPr id="16" name="Rounded Rectangle 15">
+            <a:extLst>
+              <a:ext uri="{FF2B5EF4-FFF2-40B4-BE49-F238E27FC236}">
+                <a16:creationId xmlns:a16="http://schemas.microsoft.com/office/drawing/2014/main" id="{D54047CF-935F-8CDD-60F2-4EBECD0AA6CD}"/>
+              </a:ext>
+            </a:extLst>
+          </p:cNvPr>
+          <p:cNvSpPr/>
+          <p:nvPr/>
+        </p:nvSpPr>
+        <p:spPr>
+          <a:xfrm>
+            <a:off x="2520338" y="878230"/>
+            <a:ext cx="2195192" cy="145267"/>
+          </a:xfrm>
+          <a:prstGeom prst="roundRect">
+            <a:avLst>
+              <a:gd name="adj" fmla="val 0"/>
+            </a:avLst>
+          </a:prstGeom>
+          <a:solidFill>
+            <a:srgbClr val="FFCF63">
+              <a:alpha val="32941"/>
+            </a:srgbClr>
+          </a:solidFill>
+          <a:ln w="6350">
+            <a:solidFill>
+              <a:schemeClr val="tx1">
+                <a:lumMod val="50000"/>
+                <a:lumOff val="50000"/>
+              </a:schemeClr>
+            </a:solidFill>
+            <a:prstDash val="solid"/>
+          </a:ln>
+        </p:spPr>
+        <p:style>
+          <a:lnRef idx="2">
+            <a:schemeClr val="accent1">
+              <a:shade val="15000"/>
+            </a:schemeClr>
+          </a:lnRef>
+          <a:fillRef idx="1">
+            <a:schemeClr val="accent1"/>
+          </a:fillRef>
+          <a:effectRef idx="0">
+            <a:schemeClr val="accent1"/>
+          </a:effectRef>
+          <a:fontRef idx="minor">
+            <a:schemeClr val="lt1"/>
+          </a:fontRef>
+        </p:style>
+        <p:txBody>
+          <a:bodyPr rtlCol="0" anchor="ctr"/>
+          <a:lstStyle/>
+          <a:p>
+            <a:pPr algn="ctr"/>
+            <a:r>
+              <a:rPr lang="en-US" sz="600" b="1" dirty="0">
+                <a:solidFill>
+                  <a:schemeClr val="tx1"/>
+                </a:solidFill>
+                <a:latin typeface="NewComputerModern08" pitchFamily="2" charset="77"/>
+                <a:cs typeface="Times New Roman" panose="02020603050405020304" pitchFamily="18" charset="0"/>
+              </a:rPr>
+              <a:t>Cryptographic Parameters</a:t>
+            </a:r>
+            <a:endParaRPr lang="en-US" sz="1400" b="1" dirty="0">
+              <a:solidFill>
+                <a:schemeClr val="tx1"/>
+              </a:solidFill>
+            </a:endParaRPr>
+          </a:p>
+        </p:txBody>
+      </p:sp>
+      <p:sp>
+        <p:nvSpPr>
+          <p:cNvPr id="17" name="Rounded Rectangle 16">
+            <a:extLst>
+              <a:ext uri="{FF2B5EF4-FFF2-40B4-BE49-F238E27FC236}">
+                <a16:creationId xmlns:a16="http://schemas.microsoft.com/office/drawing/2014/main" id="{95B1FB61-579F-B712-9255-807A40206779}"/>
+              </a:ext>
+            </a:extLst>
+          </p:cNvPr>
+          <p:cNvSpPr/>
+          <p:nvPr/>
+        </p:nvSpPr>
+        <p:spPr>
+          <a:xfrm>
+            <a:off x="2520337" y="1023497"/>
+            <a:ext cx="2195192" cy="230280"/>
+          </a:xfrm>
+          <a:prstGeom prst="roundRect">
+            <a:avLst>
+              <a:gd name="adj" fmla="val 0"/>
+            </a:avLst>
+          </a:prstGeom>
+          <a:solidFill>
+            <a:srgbClr val="91AEFF">
+              <a:alpha val="12157"/>
+            </a:srgbClr>
+          </a:solidFill>
+          <a:ln w="6350">
+            <a:solidFill>
+              <a:schemeClr val="tx1">
+                <a:lumMod val="50000"/>
+                <a:lumOff val="50000"/>
+              </a:schemeClr>
+            </a:solidFill>
+            <a:prstDash val="solid"/>
+          </a:ln>
+        </p:spPr>
+        <p:style>
+          <a:lnRef idx="2">
+            <a:schemeClr val="accent1">
+              <a:shade val="15000"/>
+            </a:schemeClr>
+          </a:lnRef>
+          <a:fillRef idx="1">
+            <a:schemeClr val="accent1"/>
+          </a:fillRef>
+          <a:effectRef idx="0">
+            <a:schemeClr val="accent1"/>
+          </a:effectRef>
+          <a:fontRef idx="minor">
+            <a:schemeClr val="lt1"/>
+          </a:fontRef>
+        </p:style>
+        <p:txBody>
+          <a:bodyPr rtlCol="0" anchor="ctr"/>
+          <a:lstStyle/>
+          <a:p>
+            <a:pPr marL="171450" indent="-171450">
+              <a:buFont typeface="Arial" panose="020B0604020202020204" pitchFamily="34" charset="0"/>
+              <a:buChar char="•"/>
+            </a:pPr>
+            <a:r>
+              <a:rPr lang="en-US" sz="600" dirty="0">
+                <a:solidFill>
+                  <a:schemeClr val="tx1"/>
+                </a:solidFill>
+                <a:latin typeface="NewComputerModern08" pitchFamily="2" charset="77"/>
+                <a:cs typeface="Times New Roman" panose="02020603050405020304" pitchFamily="18" charset="0"/>
+              </a:rPr>
+              <a:t>BN254 + KZG with domain size n (</a:t>
+            </a:r>
+            <a:r>
+              <a:rPr lang="en-US" sz="600" dirty="0" err="1">
+                <a:solidFill>
+                  <a:schemeClr val="tx1"/>
+                </a:solidFill>
+                <a:latin typeface="NewComputerModern08" pitchFamily="2" charset="77"/>
+                <a:cs typeface="Times New Roman" panose="02020603050405020304" pitchFamily="18" charset="0"/>
+              </a:rPr>
+              <a:t>s.t.</a:t>
+            </a:r>
+            <a:r>
+              <a:rPr lang="en-US" sz="600" dirty="0">
+                <a:solidFill>
+                  <a:schemeClr val="tx1"/>
+                </a:solidFill>
+                <a:latin typeface="NewComputerModern08" pitchFamily="2" charset="77"/>
+                <a:cs typeface="Times New Roman" panose="02020603050405020304" pitchFamily="18" charset="0"/>
+              </a:rPr>
+              <a:t>, 2</a:t>
+            </a:r>
+            <a:r>
+              <a:rPr lang="en-US" sz="600" baseline="30000" dirty="0">
+                <a:solidFill>
+                  <a:schemeClr val="tx1"/>
+                </a:solidFill>
+                <a:latin typeface="NewComputerModern08" pitchFamily="2" charset="77"/>
+                <a:cs typeface="Times New Roman" panose="02020603050405020304" pitchFamily="18" charset="0"/>
+              </a:rPr>
+              <a:t>n</a:t>
+            </a:r>
+            <a:r>
+              <a:rPr lang="en-US" sz="600" dirty="0">
+                <a:solidFill>
+                  <a:schemeClr val="tx1"/>
+                </a:solidFill>
+                <a:latin typeface="NewComputerModern08" pitchFamily="2" charset="77"/>
+                <a:cs typeface="Times New Roman" panose="02020603050405020304" pitchFamily="18" charset="0"/>
+              </a:rPr>
+              <a:t> = </a:t>
+            </a:r>
+            <a:r>
+              <a:rPr lang="en-US" sz="600" dirty="0" err="1">
+                <a:solidFill>
+                  <a:schemeClr val="tx1"/>
+                </a:solidFill>
+                <a:latin typeface="NewComputerModern08" pitchFamily="2" charset="77"/>
+                <a:cs typeface="Times New Roman" panose="02020603050405020304" pitchFamily="18" charset="0"/>
+              </a:rPr>
+              <a:t>P+x</a:t>
+            </a:r>
+            <a:r>
+              <a:rPr lang="en-US" sz="600" dirty="0">
+                <a:solidFill>
+                  <a:schemeClr val="tx1"/>
+                </a:solidFill>
+                <a:latin typeface="NewComputerModern08" pitchFamily="2" charset="77"/>
+                <a:cs typeface="Times New Roman" panose="02020603050405020304" pitchFamily="18" charset="0"/>
+              </a:rPr>
+              <a:t>)</a:t>
+            </a:r>
+          </a:p>
+          <a:p>
+            <a:pPr marL="171450" indent="-171450">
+              <a:buFont typeface="Arial" panose="020B0604020202020204" pitchFamily="34" charset="0"/>
+              <a:buChar char="•"/>
+            </a:pPr>
+            <a:r>
+              <a:rPr lang="en-US" sz="600" dirty="0">
+                <a:solidFill>
+                  <a:schemeClr val="tx1"/>
+                </a:solidFill>
+                <a:latin typeface="NewComputerModern08" pitchFamily="2" charset="77"/>
+                <a:cs typeface="Times New Roman" panose="02020603050405020304" pitchFamily="18" charset="0"/>
+              </a:rPr>
+              <a:t>ETH powers of tau SRS (degree n)</a:t>
+            </a:r>
+            <a:endParaRPr lang="en-US" dirty="0"/>
+          </a:p>
+        </p:txBody>
+      </p:sp>
+      <p:cxnSp>
+        <p:nvCxnSpPr>
+          <p:cNvPr id="25" name="Straight Arrow Connector 24">
+            <a:extLst>
+              <a:ext uri="{FF2B5EF4-FFF2-40B4-BE49-F238E27FC236}">
+                <a16:creationId xmlns:a16="http://schemas.microsoft.com/office/drawing/2014/main" id="{E1EB4534-D594-34A8-A1C1-A570312F4DA9}"/>
+              </a:ext>
+            </a:extLst>
+          </p:cNvPr>
+          <p:cNvCxnSpPr>
+            <a:cxnSpLocks/>
+            <a:stCxn id="15" idx="1"/>
+            <a:endCxn id="3" idx="3"/>
+          </p:cNvCxnSpPr>
+          <p:nvPr/>
+        </p:nvCxnSpPr>
+        <p:spPr>
+          <a:xfrm flipH="1" flipV="1">
+            <a:off x="2245806" y="568927"/>
+            <a:ext cx="274532" cy="518"/>
+          </a:xfrm>
+          <a:prstGeom prst="straightConnector1">
+            <a:avLst/>
+          </a:prstGeom>
+          <a:ln w="9525">
+            <a:solidFill>
+              <a:schemeClr val="tx1">
+                <a:lumMod val="65000"/>
+                <a:lumOff val="35000"/>
+              </a:schemeClr>
+            </a:solidFill>
+            <a:tailEnd type="triangle" w="sm" len="med"/>
+          </a:ln>
+        </p:spPr>
+        <p:style>
+          <a:lnRef idx="2">
+            <a:schemeClr val="accent1"/>
+          </a:lnRef>
+          <a:fillRef idx="0">
+            <a:schemeClr val="accent1"/>
+          </a:fillRef>
+          <a:effectRef idx="1">
+            <a:schemeClr val="accent1"/>
+          </a:effectRef>
+          <a:fontRef idx="minor">
+            <a:schemeClr val="tx1"/>
+          </a:fontRef>
+        </p:style>
+      </p:cxnSp>
+      <p:cxnSp>
+        <p:nvCxnSpPr>
+          <p:cNvPr id="29" name="Straight Arrow Connector 28">
+            <a:extLst>
+              <a:ext uri="{FF2B5EF4-FFF2-40B4-BE49-F238E27FC236}">
+                <a16:creationId xmlns:a16="http://schemas.microsoft.com/office/drawing/2014/main" id="{A63F945E-4F6C-3C4C-519A-9A9AE347AA3C}"/>
+              </a:ext>
+            </a:extLst>
+          </p:cNvPr>
+          <p:cNvCxnSpPr>
+            <a:cxnSpLocks/>
+            <a:endCxn id="42" idx="0"/>
+          </p:cNvCxnSpPr>
+          <p:nvPr/>
+        </p:nvCxnSpPr>
+        <p:spPr>
+          <a:xfrm>
+            <a:off x="1743580" y="756945"/>
+            <a:ext cx="0" cy="196243"/>
+          </a:xfrm>
+          <a:prstGeom prst="straightConnector1">
+            <a:avLst/>
+          </a:prstGeom>
+          <a:ln w="9525">
+            <a:solidFill>
+              <a:schemeClr val="tx1">
+                <a:lumMod val="65000"/>
+                <a:lumOff val="35000"/>
+              </a:schemeClr>
+            </a:solidFill>
+            <a:tailEnd type="triangle" w="sm" len="med"/>
+          </a:ln>
+        </p:spPr>
+        <p:style>
+          <a:lnRef idx="2">
+            <a:schemeClr val="accent1"/>
+          </a:lnRef>
+          <a:fillRef idx="0">
+            <a:schemeClr val="accent1"/>
+          </a:fillRef>
+          <a:effectRef idx="1">
+            <a:schemeClr val="accent1"/>
+          </a:effectRef>
+          <a:fontRef idx="minor">
+            <a:schemeClr val="tx1"/>
+          </a:fontRef>
+        </p:style>
+      </p:cxnSp>
+      <p:cxnSp>
+        <p:nvCxnSpPr>
+          <p:cNvPr id="32" name="Straight Arrow Connector 31">
+            <a:extLst>
+              <a:ext uri="{FF2B5EF4-FFF2-40B4-BE49-F238E27FC236}">
+                <a16:creationId xmlns:a16="http://schemas.microsoft.com/office/drawing/2014/main" id="{DB37F4AF-72CD-A509-1EA2-C4F1B532433D}"/>
+              </a:ext>
+            </a:extLst>
+          </p:cNvPr>
+          <p:cNvCxnSpPr>
+            <a:cxnSpLocks/>
+            <a:stCxn id="17" idx="1"/>
+            <a:endCxn id="42" idx="3"/>
+          </p:cNvCxnSpPr>
+          <p:nvPr/>
+        </p:nvCxnSpPr>
+        <p:spPr>
+          <a:xfrm flipH="1" flipV="1">
+            <a:off x="2245806" y="1137854"/>
+            <a:ext cx="274531" cy="783"/>
+          </a:xfrm>
+          <a:prstGeom prst="straightConnector1">
+            <a:avLst/>
+          </a:prstGeom>
+          <a:ln w="9525">
+            <a:solidFill>
+              <a:schemeClr val="tx1">
+                <a:lumMod val="65000"/>
+                <a:lumOff val="35000"/>
+              </a:schemeClr>
+            </a:solidFill>
+            <a:tailEnd type="triangle" w="sm" len="med"/>
+          </a:ln>
+        </p:spPr>
+        <p:style>
+          <a:lnRef idx="2">
+            <a:schemeClr val="accent1"/>
+          </a:lnRef>
+          <a:fillRef idx="0">
+            <a:schemeClr val="accent1"/>
+          </a:fillRef>
+          <a:effectRef idx="1">
+            <a:schemeClr val="accent1"/>
+          </a:effectRef>
+          <a:fontRef idx="minor">
+            <a:schemeClr val="tx1"/>
+          </a:fontRef>
+        </p:style>
+      </p:cxnSp>
+      <p:sp>
+        <p:nvSpPr>
+          <p:cNvPr id="38" name="TextBox 37">
+            <a:extLst>
+              <a:ext uri="{FF2B5EF4-FFF2-40B4-BE49-F238E27FC236}">
+                <a16:creationId xmlns:a16="http://schemas.microsoft.com/office/drawing/2014/main" id="{D8F2F98E-FB1F-031F-CA96-DA49C3D3B805}"/>
               </a:ext>
             </a:extLst>
           </p:cNvPr>
@@ -3451,8 +4094,8 @@
         </p:nvSpPr>
         <p:spPr>
           <a:xfrm>
-            <a:off x="1442925" y="713933"/>
-            <a:ext cx="1688122" cy="230832"/>
+            <a:off x="169974" y="953971"/>
+            <a:ext cx="1004452" cy="369332"/>
           </a:xfrm>
           <a:prstGeom prst="rect">
             <a:avLst/>
@@ -3474,134 +4117,21 @@
           <a:p>
             <a:pPr algn="ctr"/>
             <a:r>
-              <a:rPr lang="en-US" sz="900" dirty="0">
+              <a:rPr lang="en-US" sz="600" dirty="0">
                 <a:latin typeface="NewComputerModern08" pitchFamily="2" charset="77"/>
                 <a:cs typeface="Times New Roman" panose="02020603050405020304" pitchFamily="18" charset="0"/>
               </a:rPr>
-              <a:t>Input blah b</a:t>
-            </a:r>
-            <a:endParaRPr lang="en-US" sz="1400" dirty="0">
-              <a:latin typeface="NewComputerModern08" pitchFamily="2" charset="77"/>
-              <a:cs typeface="Times New Roman" panose="02020603050405020304" pitchFamily="18" charset="0"/>
-            </a:endParaRPr>
-          </a:p>
-        </p:txBody>
-      </p:sp>
-      <p:sp>
-        <p:nvSpPr>
-          <p:cNvPr id="6" name="Rectangle 5">
-            <a:extLst>
-              <a:ext uri="{FF2B5EF4-FFF2-40B4-BE49-F238E27FC236}">
-                <a16:creationId xmlns:a16="http://schemas.microsoft.com/office/drawing/2014/main" id="{FDF1EF41-EA21-B2C1-957F-8D71009527DF}"/>
-              </a:ext>
-            </a:extLst>
-          </p:cNvPr>
-          <p:cNvSpPr/>
-          <p:nvPr/>
-        </p:nvSpPr>
-        <p:spPr>
-          <a:xfrm>
-            <a:off x="2" y="0"/>
-            <a:ext cx="4920341" cy="6858000"/>
-          </a:xfrm>
-          <a:prstGeom prst="rect">
-            <a:avLst/>
-          </a:prstGeom>
-          <a:noFill/>
-          <a:ln w="3175"/>
-        </p:spPr>
-        <p:style>
-          <a:lnRef idx="2">
-            <a:schemeClr val="accent1">
-              <a:shade val="15000"/>
-            </a:schemeClr>
-          </a:lnRef>
-          <a:fillRef idx="1">
-            <a:schemeClr val="accent1"/>
-          </a:fillRef>
-          <a:effectRef idx="0">
-            <a:schemeClr val="accent1"/>
-          </a:effectRef>
-          <a:fontRef idx="minor">
-            <a:schemeClr val="lt1"/>
-          </a:fontRef>
-        </p:style>
-        <p:txBody>
-          <a:bodyPr rtlCol="0" anchor="ctr"/>
-          <a:lstStyle/>
-          <a:p>
-            <a:pPr algn="ctr"/>
-            <a:endParaRPr lang="en-US"/>
-          </a:p>
-        </p:txBody>
-      </p:sp>
-      <p:sp>
-        <p:nvSpPr>
-          <p:cNvPr id="7" name="Rounded Rectangle 6">
-            <a:extLst>
-              <a:ext uri="{FF2B5EF4-FFF2-40B4-BE49-F238E27FC236}">
-                <a16:creationId xmlns:a16="http://schemas.microsoft.com/office/drawing/2014/main" id="{47DF4524-80DC-820A-45DD-845EE8DEC8AA}"/>
-              </a:ext>
-            </a:extLst>
-          </p:cNvPr>
-          <p:cNvSpPr/>
-          <p:nvPr/>
-        </p:nvSpPr>
-        <p:spPr>
-          <a:xfrm>
-            <a:off x="1283388" y="3280730"/>
-            <a:ext cx="2007197" cy="1449871"/>
-          </a:xfrm>
-          <a:prstGeom prst="roundRect">
-            <a:avLst>
-              <a:gd name="adj" fmla="val 2505"/>
-            </a:avLst>
-          </a:prstGeom>
-          <a:solidFill>
-            <a:srgbClr val="FBFF00">
-              <a:alpha val="12157"/>
-            </a:srgbClr>
-          </a:solidFill>
-          <a:ln w="9525">
-            <a:solidFill>
-              <a:schemeClr val="bg1">
-                <a:lumMod val="65000"/>
-              </a:schemeClr>
-            </a:solidFill>
-            <a:prstDash val="dash"/>
-          </a:ln>
-        </p:spPr>
-        <p:style>
-          <a:lnRef idx="2">
-            <a:schemeClr val="accent1">
-              <a:shade val="15000"/>
-            </a:schemeClr>
-          </a:lnRef>
-          <a:fillRef idx="1">
-            <a:schemeClr val="accent1"/>
-          </a:fillRef>
-          <a:effectRef idx="0">
-            <a:schemeClr val="accent1"/>
-          </a:effectRef>
-          <a:fontRef idx="minor">
-            <a:schemeClr val="lt1"/>
-          </a:fontRef>
-        </p:style>
-        <p:txBody>
-          <a:bodyPr rtlCol="0" anchor="ctr"/>
-          <a:lstStyle/>
-          <a:p>
-            <a:pPr algn="ctr"/>
-            <a:endParaRPr lang="en-US"/>
-          </a:p>
-        </p:txBody>
-      </p:sp>
-      <p:sp>
-        <p:nvSpPr>
-          <p:cNvPr id="8" name="TextBox 7">
-            <a:extLst>
-              <a:ext uri="{FF2B5EF4-FFF2-40B4-BE49-F238E27FC236}">
-                <a16:creationId xmlns:a16="http://schemas.microsoft.com/office/drawing/2014/main" id="{A883A7C4-72CB-FC52-8410-3A915A67D588}"/>
+              <a:t>Print paper ballots with IDs and confirmation codes</a:t>
+            </a:r>
+          </a:p>
+        </p:txBody>
+      </p:sp>
+      <p:sp>
+        <p:nvSpPr>
+          <p:cNvPr id="42" name="TextBox 41">
+            <a:extLst>
+              <a:ext uri="{FF2B5EF4-FFF2-40B4-BE49-F238E27FC236}">
+                <a16:creationId xmlns:a16="http://schemas.microsoft.com/office/drawing/2014/main" id="{2866038F-38A8-1342-C9B3-EC65AA75502D}"/>
               </a:ext>
             </a:extLst>
           </p:cNvPr>
@@ -3610,8 +4140,8 @@
         </p:nvSpPr>
         <p:spPr>
           <a:xfrm>
-            <a:off x="1442925" y="3165314"/>
-            <a:ext cx="1688122" cy="230832"/>
+            <a:off x="1241354" y="953188"/>
+            <a:ext cx="1004452" cy="369332"/>
           </a:xfrm>
           <a:prstGeom prst="rect">
             <a:avLst/>
@@ -3633,13 +4163,168 @@
           <a:p>
             <a:pPr algn="ctr"/>
             <a:r>
-              <a:rPr lang="en-US" sz="900" dirty="0">
+              <a:rPr lang="en-US" sz="600" dirty="0">
                 <a:latin typeface="NewComputerModern08" pitchFamily="2" charset="77"/>
                 <a:cs typeface="Times New Roman" panose="02020603050405020304" pitchFamily="18" charset="0"/>
               </a:rPr>
-              <a:t>Setup</a:t>
-            </a:r>
-            <a:endParaRPr lang="en-US" sz="1400" dirty="0">
+              <a:t>Compile and deploy verifier smart contract in Solidity</a:t>
+            </a:r>
+          </a:p>
+        </p:txBody>
+      </p:sp>
+      <p:cxnSp>
+        <p:nvCxnSpPr>
+          <p:cNvPr id="45" name="Straight Arrow Connector 44">
+            <a:extLst>
+              <a:ext uri="{FF2B5EF4-FFF2-40B4-BE49-F238E27FC236}">
+                <a16:creationId xmlns:a16="http://schemas.microsoft.com/office/drawing/2014/main" id="{92E8BA0F-054D-CA34-6727-43019EDFCFFE}"/>
+              </a:ext>
+            </a:extLst>
+          </p:cNvPr>
+          <p:cNvCxnSpPr>
+            <a:cxnSpLocks/>
+            <a:endCxn id="38" idx="0"/>
+          </p:cNvCxnSpPr>
+          <p:nvPr/>
+        </p:nvCxnSpPr>
+        <p:spPr>
+          <a:xfrm>
+            <a:off x="672200" y="754376"/>
+            <a:ext cx="0" cy="199595"/>
+          </a:xfrm>
+          <a:prstGeom prst="straightConnector1">
+            <a:avLst/>
+          </a:prstGeom>
+          <a:ln w="9525">
+            <a:solidFill>
+              <a:schemeClr val="tx1">
+                <a:lumMod val="65000"/>
+                <a:lumOff val="35000"/>
+              </a:schemeClr>
+            </a:solidFill>
+            <a:tailEnd type="triangle" w="sm" len="med"/>
+          </a:ln>
+        </p:spPr>
+        <p:style>
+          <a:lnRef idx="2">
+            <a:schemeClr val="accent1"/>
+          </a:lnRef>
+          <a:fillRef idx="0">
+            <a:schemeClr val="accent1"/>
+          </a:fillRef>
+          <a:effectRef idx="1">
+            <a:schemeClr val="accent1"/>
+          </a:effectRef>
+          <a:fontRef idx="minor">
+            <a:schemeClr val="tx1"/>
+          </a:fontRef>
+        </p:style>
+      </p:cxnSp>
+      <p:sp>
+        <p:nvSpPr>
+          <p:cNvPr id="55" name="Rounded Rectangle 54">
+            <a:extLst>
+              <a:ext uri="{FF2B5EF4-FFF2-40B4-BE49-F238E27FC236}">
+                <a16:creationId xmlns:a16="http://schemas.microsoft.com/office/drawing/2014/main" id="{39B05B60-68E7-1632-68BA-97AFBBBD3F25}"/>
+              </a:ext>
+            </a:extLst>
+          </p:cNvPr>
+          <p:cNvSpPr/>
+          <p:nvPr/>
+        </p:nvSpPr>
+        <p:spPr>
+          <a:xfrm>
+            <a:off x="36646" y="1756252"/>
+            <a:ext cx="2355946" cy="1137970"/>
+          </a:xfrm>
+          <a:prstGeom prst="roundRect">
+            <a:avLst>
+              <a:gd name="adj" fmla="val 3202"/>
+            </a:avLst>
+          </a:prstGeom>
+          <a:solidFill>
+            <a:srgbClr val="FBFF00">
+              <a:alpha val="12157"/>
+            </a:srgbClr>
+          </a:solidFill>
+          <a:ln w="6350">
+            <a:solidFill>
+              <a:schemeClr val="bg1">
+                <a:lumMod val="50000"/>
+              </a:schemeClr>
+            </a:solidFill>
+            <a:prstDash val="dash"/>
+          </a:ln>
+        </p:spPr>
+        <p:style>
+          <a:lnRef idx="2">
+            <a:schemeClr val="accent1">
+              <a:shade val="15000"/>
+            </a:schemeClr>
+          </a:lnRef>
+          <a:fillRef idx="1">
+            <a:schemeClr val="accent1"/>
+          </a:fillRef>
+          <a:effectRef idx="0">
+            <a:schemeClr val="accent1"/>
+          </a:effectRef>
+          <a:fontRef idx="minor">
+            <a:schemeClr val="lt1"/>
+          </a:fontRef>
+        </p:style>
+        <p:txBody>
+          <a:bodyPr rtlCol="0" anchor="ctr"/>
+          <a:lstStyle/>
+          <a:p>
+            <a:pPr algn="ctr"/>
+            <a:endParaRPr lang="en-US"/>
+          </a:p>
+        </p:txBody>
+      </p:sp>
+      <p:sp>
+        <p:nvSpPr>
+          <p:cNvPr id="56" name="TextBox 55">
+            <a:extLst>
+              <a:ext uri="{FF2B5EF4-FFF2-40B4-BE49-F238E27FC236}">
+                <a16:creationId xmlns:a16="http://schemas.microsoft.com/office/drawing/2014/main" id="{B42DF7BA-9741-873A-AA49-2961D486C3AA}"/>
+              </a:ext>
+            </a:extLst>
+          </p:cNvPr>
+          <p:cNvSpPr txBox="1"/>
+          <p:nvPr/>
+        </p:nvSpPr>
+        <p:spPr>
+          <a:xfrm>
+            <a:off x="561591" y="1663918"/>
+            <a:ext cx="1306054" cy="184666"/>
+          </a:xfrm>
+          <a:prstGeom prst="rect">
+            <a:avLst/>
+          </a:prstGeom>
+          <a:solidFill>
+            <a:schemeClr val="bg1"/>
+          </a:solidFill>
+          <a:ln w="6350">
+            <a:solidFill>
+              <a:schemeClr val="tx1"/>
+            </a:solidFill>
+          </a:ln>
+        </p:spPr>
+        <p:txBody>
+          <a:bodyPr wrap="square" rtlCol="0">
+            <a:spAutoFit/>
+          </a:bodyPr>
+          <a:lstStyle/>
+          <a:p>
+            <a:pPr algn="ctr"/>
+            <a:r>
+              <a:rPr lang="en-US" sz="600" b="1" dirty="0">
+                <a:latin typeface="NewComputerModern08" pitchFamily="2" charset="77"/>
+                <a:cs typeface="Times New Roman" panose="02020603050405020304" pitchFamily="18" charset="0"/>
+              </a:rPr>
+              <a:t>Voting</a:t>
+            </a:r>
+            <a:endParaRPr lang="en-US" sz="1050" b="1" dirty="0">
               <a:latin typeface="NewComputerModern08" pitchFamily="2" charset="77"/>
               <a:cs typeface="Times New Roman" panose="02020603050405020304" pitchFamily="18" charset="0"/>
             </a:endParaRPr>
@@ -3648,10 +4333,10 @@
       </p:sp>
       <p:sp>
         <p:nvSpPr>
-          <p:cNvPr id="9" name="TextBox 8">
-            <a:extLst>
-              <a:ext uri="{FF2B5EF4-FFF2-40B4-BE49-F238E27FC236}">
-                <a16:creationId xmlns:a16="http://schemas.microsoft.com/office/drawing/2014/main" id="{CE72BE85-6FBE-8A89-71FB-2607B531AAC1}"/>
+          <p:cNvPr id="62" name="TextBox 61">
+            <a:extLst>
+              <a:ext uri="{FF2B5EF4-FFF2-40B4-BE49-F238E27FC236}">
+                <a16:creationId xmlns:a16="http://schemas.microsoft.com/office/drawing/2014/main" id="{35AB0B7E-EADD-82C0-D6B6-5F67C89CB98D}"/>
               </a:ext>
             </a:extLst>
           </p:cNvPr>
@@ -3660,8 +4345,8 @@
         </p:nvSpPr>
         <p:spPr>
           <a:xfrm>
-            <a:off x="1442925" y="3511562"/>
-            <a:ext cx="1688122" cy="230832"/>
+            <a:off x="94481" y="2427930"/>
+            <a:ext cx="587193" cy="369332"/>
           </a:xfrm>
           <a:prstGeom prst="rect">
             <a:avLst/>
@@ -3683,19 +4368,3570 @@
           <a:p>
             <a:pPr algn="ctr"/>
             <a:r>
-              <a:rPr lang="en-US" sz="900" dirty="0">
+              <a:rPr lang="en-US" sz="600" dirty="0">
                 <a:latin typeface="NewComputerModern08" pitchFamily="2" charset="77"/>
                 <a:cs typeface="Times New Roman" panose="02020603050405020304" pitchFamily="18" charset="0"/>
               </a:rPr>
-              <a:t>Input blah b</a:t>
-            </a:r>
-            <a:endParaRPr lang="en-US" sz="1400" dirty="0">
+              <a:t>Voter marks and casts ballot</a:t>
+            </a:r>
+          </a:p>
+        </p:txBody>
+      </p:sp>
+      <p:cxnSp>
+        <p:nvCxnSpPr>
+          <p:cNvPr id="63" name="Straight Arrow Connector 62">
+            <a:extLst>
+              <a:ext uri="{FF2B5EF4-FFF2-40B4-BE49-F238E27FC236}">
+                <a16:creationId xmlns:a16="http://schemas.microsoft.com/office/drawing/2014/main" id="{94181697-6B3A-91AB-41F8-D1333EA53B62}"/>
+              </a:ext>
+            </a:extLst>
+          </p:cNvPr>
+          <p:cNvCxnSpPr>
+            <a:cxnSpLocks/>
+            <a:endCxn id="70" idx="0"/>
+          </p:cNvCxnSpPr>
+          <p:nvPr/>
+        </p:nvCxnSpPr>
+        <p:spPr>
+          <a:xfrm>
+            <a:off x="388322" y="1321371"/>
+            <a:ext cx="0" cy="542213"/>
+          </a:xfrm>
+          <a:prstGeom prst="straightConnector1">
+            <a:avLst/>
+          </a:prstGeom>
+          <a:ln w="9525">
+            <a:solidFill>
+              <a:schemeClr val="tx1">
+                <a:lumMod val="65000"/>
+                <a:lumOff val="35000"/>
+              </a:schemeClr>
+            </a:solidFill>
+            <a:tailEnd type="triangle" w="sm" len="med"/>
+          </a:ln>
+        </p:spPr>
+        <p:style>
+          <a:lnRef idx="2">
+            <a:schemeClr val="accent1"/>
+          </a:lnRef>
+          <a:fillRef idx="0">
+            <a:schemeClr val="accent1"/>
+          </a:fillRef>
+          <a:effectRef idx="1">
+            <a:schemeClr val="accent1"/>
+          </a:effectRef>
+          <a:fontRef idx="minor">
+            <a:schemeClr val="tx1"/>
+          </a:fontRef>
+        </p:style>
+      </p:cxnSp>
+      <p:sp>
+        <p:nvSpPr>
+          <p:cNvPr id="65" name="Rounded Rectangle 64">
+            <a:extLst>
+              <a:ext uri="{FF2B5EF4-FFF2-40B4-BE49-F238E27FC236}">
+                <a16:creationId xmlns:a16="http://schemas.microsoft.com/office/drawing/2014/main" id="{B1D28E3B-7C91-6974-3C68-4324D2E400B1}"/>
+              </a:ext>
+            </a:extLst>
+          </p:cNvPr>
+          <p:cNvSpPr/>
+          <p:nvPr/>
+        </p:nvSpPr>
+        <p:spPr>
+          <a:xfrm>
+            <a:off x="102810" y="3046311"/>
+            <a:ext cx="1082896" cy="145267"/>
+          </a:xfrm>
+          <a:prstGeom prst="roundRect">
+            <a:avLst>
+              <a:gd name="adj" fmla="val 0"/>
+            </a:avLst>
+          </a:prstGeom>
+          <a:solidFill>
+            <a:srgbClr val="91AEFF">
+              <a:alpha val="32941"/>
+            </a:srgbClr>
+          </a:solidFill>
+          <a:ln w="6350">
+            <a:solidFill>
+              <a:schemeClr val="tx1">
+                <a:lumMod val="50000"/>
+                <a:lumOff val="50000"/>
+              </a:schemeClr>
+            </a:solidFill>
+            <a:prstDash val="solid"/>
+          </a:ln>
+        </p:spPr>
+        <p:style>
+          <a:lnRef idx="2">
+            <a:schemeClr val="accent1">
+              <a:shade val="15000"/>
+            </a:schemeClr>
+          </a:lnRef>
+          <a:fillRef idx="1">
+            <a:schemeClr val="accent1"/>
+          </a:fillRef>
+          <a:effectRef idx="0">
+            <a:schemeClr val="accent1"/>
+          </a:effectRef>
+          <a:fontRef idx="minor">
+            <a:schemeClr val="lt1"/>
+          </a:fontRef>
+        </p:style>
+        <p:txBody>
+          <a:bodyPr rtlCol="0" anchor="ctr"/>
+          <a:lstStyle/>
+          <a:p>
+            <a:pPr algn="ctr"/>
+            <a:r>
+              <a:rPr lang="en-US" sz="600" b="1" dirty="0">
+                <a:solidFill>
+                  <a:schemeClr val="tx1"/>
+                </a:solidFill>
+                <a:latin typeface="NewComputerModern08" pitchFamily="2" charset="77"/>
+                <a:cs typeface="Times New Roman" panose="02020603050405020304" pitchFamily="18" charset="0"/>
+              </a:rPr>
+              <a:t>Output</a:t>
+            </a:r>
+            <a:endParaRPr lang="en-US" sz="1400" b="1" dirty="0">
+              <a:solidFill>
+                <a:schemeClr val="tx1"/>
+              </a:solidFill>
+            </a:endParaRPr>
+          </a:p>
+        </p:txBody>
+      </p:sp>
+      <p:sp>
+        <p:nvSpPr>
+          <p:cNvPr id="66" name="Rounded Rectangle 65">
+            <a:extLst>
+              <a:ext uri="{FF2B5EF4-FFF2-40B4-BE49-F238E27FC236}">
+                <a16:creationId xmlns:a16="http://schemas.microsoft.com/office/drawing/2014/main" id="{A2C5AC02-C310-9291-1FE8-EFAE83C9890E}"/>
+              </a:ext>
+            </a:extLst>
+          </p:cNvPr>
+          <p:cNvSpPr/>
+          <p:nvPr/>
+        </p:nvSpPr>
+        <p:spPr>
+          <a:xfrm>
+            <a:off x="102809" y="3191578"/>
+            <a:ext cx="1082896" cy="299867"/>
+          </a:xfrm>
+          <a:prstGeom prst="roundRect">
+            <a:avLst>
+              <a:gd name="adj" fmla="val 0"/>
+            </a:avLst>
+          </a:prstGeom>
+          <a:noFill/>
+          <a:ln w="6350">
+            <a:solidFill>
+              <a:schemeClr val="tx1">
+                <a:lumMod val="50000"/>
+                <a:lumOff val="50000"/>
+              </a:schemeClr>
+            </a:solidFill>
+            <a:prstDash val="solid"/>
+          </a:ln>
+        </p:spPr>
+        <p:style>
+          <a:lnRef idx="2">
+            <a:schemeClr val="accent1">
+              <a:shade val="15000"/>
+            </a:schemeClr>
+          </a:lnRef>
+          <a:fillRef idx="1">
+            <a:schemeClr val="accent1"/>
+          </a:fillRef>
+          <a:effectRef idx="0">
+            <a:schemeClr val="accent1"/>
+          </a:effectRef>
+          <a:fontRef idx="minor">
+            <a:schemeClr val="lt1"/>
+          </a:fontRef>
+        </p:style>
+        <p:txBody>
+          <a:bodyPr rtlCol="0" anchor="ctr"/>
+          <a:lstStyle/>
+          <a:p>
+            <a:pPr algn="ctr"/>
+            <a:r>
+              <a:rPr lang="en-US" sz="600" dirty="0">
+                <a:solidFill>
+                  <a:schemeClr val="tx1"/>
+                </a:solidFill>
+                <a:latin typeface="NewComputerModern08" pitchFamily="2" charset="77"/>
+                <a:cs typeface="Times New Roman" panose="02020603050405020304" pitchFamily="18" charset="0"/>
+              </a:rPr>
+              <a:t>Voter receives receipt with ID and confirmation codes</a:t>
+            </a:r>
+          </a:p>
+        </p:txBody>
+      </p:sp>
+      <p:sp>
+        <p:nvSpPr>
+          <p:cNvPr id="70" name="Diamond 69">
+            <a:extLst>
+              <a:ext uri="{FF2B5EF4-FFF2-40B4-BE49-F238E27FC236}">
+                <a16:creationId xmlns:a16="http://schemas.microsoft.com/office/drawing/2014/main" id="{D1E6D6EF-F9E0-478C-ABF8-EB4B59E2A652}"/>
+              </a:ext>
+            </a:extLst>
+          </p:cNvPr>
+          <p:cNvSpPr/>
+          <p:nvPr/>
+        </p:nvSpPr>
+        <p:spPr>
+          <a:xfrm>
+            <a:off x="159793" y="1863584"/>
+            <a:ext cx="457058" cy="427206"/>
+          </a:xfrm>
+          <a:prstGeom prst="diamond">
+            <a:avLst/>
+          </a:prstGeom>
+          <a:solidFill>
+            <a:schemeClr val="bg1"/>
+          </a:solidFill>
+          <a:ln w="6350"/>
+        </p:spPr>
+        <p:style>
+          <a:lnRef idx="2">
+            <a:schemeClr val="accent1">
+              <a:shade val="15000"/>
+            </a:schemeClr>
+          </a:lnRef>
+          <a:fillRef idx="1">
+            <a:schemeClr val="accent1"/>
+          </a:fillRef>
+          <a:effectRef idx="0">
+            <a:schemeClr val="accent1"/>
+          </a:effectRef>
+          <a:fontRef idx="minor">
+            <a:schemeClr val="lt1"/>
+          </a:fontRef>
+        </p:style>
+        <p:txBody>
+          <a:bodyPr rtlCol="0" anchor="ctr"/>
+          <a:lstStyle/>
+          <a:p>
+            <a:pPr algn="ctr"/>
+            <a:endParaRPr lang="en-US" sz="600" dirty="0">
+              <a:solidFill>
+                <a:schemeClr val="bg1"/>
+              </a:solidFill>
+              <a:latin typeface="NewComputerModern08" pitchFamily="2" charset="77"/>
+            </a:endParaRPr>
+          </a:p>
+        </p:txBody>
+      </p:sp>
+      <p:sp>
+        <p:nvSpPr>
+          <p:cNvPr id="71" name="TextBox 70">
+            <a:extLst>
+              <a:ext uri="{FF2B5EF4-FFF2-40B4-BE49-F238E27FC236}">
+                <a16:creationId xmlns:a16="http://schemas.microsoft.com/office/drawing/2014/main" id="{29E2E2D5-7AA8-BDFD-01EC-6EA2EFD844C8}"/>
+              </a:ext>
+            </a:extLst>
+          </p:cNvPr>
+          <p:cNvSpPr txBox="1"/>
+          <p:nvPr/>
+        </p:nvSpPr>
+        <p:spPr>
+          <a:xfrm>
+            <a:off x="133607" y="1938228"/>
+            <a:ext cx="512466" cy="246221"/>
+          </a:xfrm>
+          <a:prstGeom prst="rect">
+            <a:avLst/>
+          </a:prstGeom>
+          <a:noFill/>
+        </p:spPr>
+        <p:txBody>
+          <a:bodyPr wrap="square" rtlCol="0">
+            <a:spAutoFit/>
+          </a:bodyPr>
+          <a:lstStyle/>
+          <a:p>
+            <a:pPr algn="ctr"/>
+            <a:r>
+              <a:rPr lang="en-US" sz="500" dirty="0">
+                <a:latin typeface="NewComputerModern08" pitchFamily="2" charset="77"/>
+              </a:rPr>
+              <a:t>Selected for voting?</a:t>
+            </a:r>
+          </a:p>
+        </p:txBody>
+      </p:sp>
+      <p:cxnSp>
+        <p:nvCxnSpPr>
+          <p:cNvPr id="74" name="Straight Arrow Connector 73">
+            <a:extLst>
+              <a:ext uri="{FF2B5EF4-FFF2-40B4-BE49-F238E27FC236}">
+                <a16:creationId xmlns:a16="http://schemas.microsoft.com/office/drawing/2014/main" id="{C4B3FAA9-D887-6960-75B2-DD8F5A28648F}"/>
+              </a:ext>
+            </a:extLst>
+          </p:cNvPr>
+          <p:cNvCxnSpPr>
+            <a:cxnSpLocks/>
+            <a:stCxn id="70" idx="2"/>
+            <a:endCxn id="62" idx="0"/>
+          </p:cNvCxnSpPr>
+          <p:nvPr/>
+        </p:nvCxnSpPr>
+        <p:spPr>
+          <a:xfrm flipH="1">
+            <a:off x="388078" y="2290790"/>
+            <a:ext cx="244" cy="137140"/>
+          </a:xfrm>
+          <a:prstGeom prst="straightConnector1">
+            <a:avLst/>
+          </a:prstGeom>
+          <a:ln w="9525">
+            <a:solidFill>
+              <a:schemeClr val="tx1">
+                <a:lumMod val="65000"/>
+                <a:lumOff val="35000"/>
+              </a:schemeClr>
+            </a:solidFill>
+            <a:tailEnd type="triangle" w="sm" len="med"/>
+          </a:ln>
+        </p:spPr>
+        <p:style>
+          <a:lnRef idx="2">
+            <a:schemeClr val="accent1"/>
+          </a:lnRef>
+          <a:fillRef idx="0">
+            <a:schemeClr val="accent1"/>
+          </a:fillRef>
+          <a:effectRef idx="1">
+            <a:schemeClr val="accent1"/>
+          </a:effectRef>
+          <a:fontRef idx="minor">
+            <a:schemeClr val="tx1"/>
+          </a:fontRef>
+        </p:style>
+      </p:cxnSp>
+      <p:sp>
+        <p:nvSpPr>
+          <p:cNvPr id="78" name="TextBox 77">
+            <a:extLst>
+              <a:ext uri="{FF2B5EF4-FFF2-40B4-BE49-F238E27FC236}">
+                <a16:creationId xmlns:a16="http://schemas.microsoft.com/office/drawing/2014/main" id="{6DBAE4BD-3139-5248-4F31-A6D7375F81C5}"/>
+              </a:ext>
+            </a:extLst>
+          </p:cNvPr>
+          <p:cNvSpPr txBox="1"/>
+          <p:nvPr/>
+        </p:nvSpPr>
+        <p:spPr>
+          <a:xfrm>
+            <a:off x="343147" y="2233817"/>
+            <a:ext cx="245580" cy="184666"/>
+          </a:xfrm>
+          <a:prstGeom prst="rect">
+            <a:avLst/>
+          </a:prstGeom>
+          <a:noFill/>
+        </p:spPr>
+        <p:txBody>
+          <a:bodyPr wrap="none" rtlCol="0">
+            <a:spAutoFit/>
+          </a:bodyPr>
+          <a:lstStyle/>
+          <a:p>
+            <a:r>
+              <a:rPr lang="en-US" sz="600" dirty="0">
+                <a:latin typeface="NewComputerModern08" pitchFamily="2" charset="77"/>
+              </a:rPr>
+              <a:t>Y</a:t>
+            </a:r>
+          </a:p>
+        </p:txBody>
+      </p:sp>
+      <p:cxnSp>
+        <p:nvCxnSpPr>
+          <p:cNvPr id="79" name="Straight Arrow Connector 78">
+            <a:extLst>
+              <a:ext uri="{FF2B5EF4-FFF2-40B4-BE49-F238E27FC236}">
+                <a16:creationId xmlns:a16="http://schemas.microsoft.com/office/drawing/2014/main" id="{2D54684C-1560-C091-D7CF-21EE28628A2B}"/>
+              </a:ext>
+            </a:extLst>
+          </p:cNvPr>
+          <p:cNvCxnSpPr>
+            <a:cxnSpLocks/>
+            <a:stCxn id="62" idx="2"/>
+          </p:cNvCxnSpPr>
+          <p:nvPr/>
+        </p:nvCxnSpPr>
+        <p:spPr>
+          <a:xfrm>
+            <a:off x="388078" y="2797262"/>
+            <a:ext cx="0" cy="242227"/>
+          </a:xfrm>
+          <a:prstGeom prst="straightConnector1">
+            <a:avLst/>
+          </a:prstGeom>
+          <a:ln w="9525">
+            <a:solidFill>
+              <a:schemeClr val="tx1">
+                <a:lumMod val="65000"/>
+                <a:lumOff val="35000"/>
+              </a:schemeClr>
+            </a:solidFill>
+            <a:tailEnd type="triangle" w="sm" len="med"/>
+          </a:ln>
+        </p:spPr>
+        <p:style>
+          <a:lnRef idx="2">
+            <a:schemeClr val="accent1"/>
+          </a:lnRef>
+          <a:fillRef idx="0">
+            <a:schemeClr val="accent1"/>
+          </a:fillRef>
+          <a:effectRef idx="1">
+            <a:schemeClr val="accent1"/>
+          </a:effectRef>
+          <a:fontRef idx="minor">
+            <a:schemeClr val="tx1"/>
+          </a:fontRef>
+        </p:style>
+      </p:cxnSp>
+      <p:sp>
+        <p:nvSpPr>
+          <p:cNvPr id="86" name="TextBox 85">
+            <a:extLst>
+              <a:ext uri="{FF2B5EF4-FFF2-40B4-BE49-F238E27FC236}">
+                <a16:creationId xmlns:a16="http://schemas.microsoft.com/office/drawing/2014/main" id="{EC2FA08B-177A-67BF-66B5-A763C1771CA7}"/>
+              </a:ext>
+            </a:extLst>
+          </p:cNvPr>
+          <p:cNvSpPr txBox="1"/>
+          <p:nvPr/>
+        </p:nvSpPr>
+        <p:spPr>
+          <a:xfrm>
+            <a:off x="566895" y="1923440"/>
+            <a:ext cx="245580" cy="184666"/>
+          </a:xfrm>
+          <a:prstGeom prst="rect">
+            <a:avLst/>
+          </a:prstGeom>
+          <a:noFill/>
+        </p:spPr>
+        <p:txBody>
+          <a:bodyPr wrap="none" rtlCol="0">
+            <a:spAutoFit/>
+          </a:bodyPr>
+          <a:lstStyle/>
+          <a:p>
+            <a:r>
+              <a:rPr lang="en-US" sz="600" dirty="0">
+                <a:latin typeface="NewComputerModern08" pitchFamily="2" charset="77"/>
+              </a:rPr>
+              <a:t>N</a:t>
+            </a:r>
+          </a:p>
+        </p:txBody>
+      </p:sp>
+      <p:sp>
+        <p:nvSpPr>
+          <p:cNvPr id="103" name="Rounded Rectangle 102">
+            <a:extLst>
+              <a:ext uri="{FF2B5EF4-FFF2-40B4-BE49-F238E27FC236}">
+                <a16:creationId xmlns:a16="http://schemas.microsoft.com/office/drawing/2014/main" id="{FA6C692A-7645-4FA4-FE46-FEF2935A9CB6}"/>
+              </a:ext>
+            </a:extLst>
+          </p:cNvPr>
+          <p:cNvSpPr/>
+          <p:nvPr/>
+        </p:nvSpPr>
+        <p:spPr>
+          <a:xfrm>
+            <a:off x="918032" y="1922394"/>
+            <a:ext cx="1405706" cy="895740"/>
+          </a:xfrm>
+          <a:prstGeom prst="roundRect">
+            <a:avLst>
+              <a:gd name="adj" fmla="val 3202"/>
+            </a:avLst>
+          </a:prstGeom>
+          <a:solidFill>
+            <a:schemeClr val="bg1">
+              <a:lumMod val="95000"/>
+            </a:schemeClr>
+          </a:solidFill>
+          <a:ln w="3175">
+            <a:solidFill>
+              <a:schemeClr val="bg1">
+                <a:lumMod val="50000"/>
+              </a:schemeClr>
+            </a:solidFill>
+            <a:prstDash val="solid"/>
+          </a:ln>
+        </p:spPr>
+        <p:style>
+          <a:lnRef idx="2">
+            <a:schemeClr val="accent1">
+              <a:shade val="15000"/>
+            </a:schemeClr>
+          </a:lnRef>
+          <a:fillRef idx="1">
+            <a:schemeClr val="accent1"/>
+          </a:fillRef>
+          <a:effectRef idx="0">
+            <a:schemeClr val="accent1"/>
+          </a:effectRef>
+          <a:fontRef idx="minor">
+            <a:schemeClr val="lt1"/>
+          </a:fontRef>
+        </p:style>
+        <p:txBody>
+          <a:bodyPr rtlCol="0" anchor="ctr"/>
+          <a:lstStyle/>
+          <a:p>
+            <a:pPr algn="ctr"/>
+            <a:endParaRPr lang="en-US"/>
+          </a:p>
+        </p:txBody>
+      </p:sp>
+      <p:cxnSp>
+        <p:nvCxnSpPr>
+          <p:cNvPr id="87" name="Straight Arrow Connector 86">
+            <a:extLst>
+              <a:ext uri="{FF2B5EF4-FFF2-40B4-BE49-F238E27FC236}">
+                <a16:creationId xmlns:a16="http://schemas.microsoft.com/office/drawing/2014/main" id="{B2436273-CBA2-18AB-95D7-556D49D6D38B}"/>
+              </a:ext>
+            </a:extLst>
+          </p:cNvPr>
+          <p:cNvCxnSpPr>
+            <a:cxnSpLocks/>
+            <a:endCxn id="89" idx="1"/>
+          </p:cNvCxnSpPr>
+          <p:nvPr/>
+        </p:nvCxnSpPr>
+        <p:spPr>
+          <a:xfrm>
+            <a:off x="681674" y="2612596"/>
+            <a:ext cx="380614" cy="0"/>
+          </a:xfrm>
+          <a:prstGeom prst="straightConnector1">
+            <a:avLst/>
+          </a:prstGeom>
+          <a:ln w="9525">
+            <a:solidFill>
+              <a:schemeClr val="tx1">
+                <a:lumMod val="65000"/>
+                <a:lumOff val="35000"/>
+              </a:schemeClr>
+            </a:solidFill>
+            <a:tailEnd type="triangle" w="sm" len="med"/>
+          </a:ln>
+        </p:spPr>
+        <p:style>
+          <a:lnRef idx="2">
+            <a:schemeClr val="accent1"/>
+          </a:lnRef>
+          <a:fillRef idx="0">
+            <a:schemeClr val="accent1"/>
+          </a:fillRef>
+          <a:effectRef idx="1">
+            <a:schemeClr val="accent1"/>
+          </a:effectRef>
+          <a:fontRef idx="minor">
+            <a:schemeClr val="tx1"/>
+          </a:fontRef>
+        </p:style>
+      </p:cxnSp>
+      <p:sp>
+        <p:nvSpPr>
+          <p:cNvPr id="89" name="TextBox 88">
+            <a:extLst>
+              <a:ext uri="{FF2B5EF4-FFF2-40B4-BE49-F238E27FC236}">
+                <a16:creationId xmlns:a16="http://schemas.microsoft.com/office/drawing/2014/main" id="{DDCC3440-A639-629D-7CCA-55253BD70D24}"/>
+              </a:ext>
+            </a:extLst>
+          </p:cNvPr>
+          <p:cNvSpPr txBox="1"/>
+          <p:nvPr/>
+        </p:nvSpPr>
+        <p:spPr>
+          <a:xfrm>
+            <a:off x="1062288" y="2474096"/>
+            <a:ext cx="1140828" cy="276999"/>
+          </a:xfrm>
+          <a:prstGeom prst="rect">
+            <a:avLst/>
+          </a:prstGeom>
+          <a:solidFill>
+            <a:schemeClr val="bg1"/>
+          </a:solidFill>
+          <a:ln w="3175">
+            <a:solidFill>
+              <a:schemeClr val="tx1"/>
+            </a:solidFill>
+          </a:ln>
+        </p:spPr>
+        <p:txBody>
+          <a:bodyPr wrap="square" rtlCol="0">
+            <a:spAutoFit/>
+          </a:bodyPr>
+          <a:lstStyle/>
+          <a:p>
+            <a:pPr algn="ctr"/>
+            <a:r>
+              <a:rPr lang="en-US" sz="600" dirty="0">
+                <a:latin typeface="NewComputerModern08" pitchFamily="2" charset="77"/>
+                <a:cs typeface="Times New Roman" panose="02020603050405020304" pitchFamily="18" charset="0"/>
+              </a:rPr>
+              <a:t>Ballots  scanned recording ID and mark positions</a:t>
+            </a:r>
+          </a:p>
+        </p:txBody>
+      </p:sp>
+      <p:sp>
+        <p:nvSpPr>
+          <p:cNvPr id="92" name="TextBox 91">
+            <a:extLst>
+              <a:ext uri="{FF2B5EF4-FFF2-40B4-BE49-F238E27FC236}">
+                <a16:creationId xmlns:a16="http://schemas.microsoft.com/office/drawing/2014/main" id="{0B27C246-0D5D-ABA5-420A-F737277D3B31}"/>
+              </a:ext>
+            </a:extLst>
+          </p:cNvPr>
+          <p:cNvSpPr txBox="1"/>
+          <p:nvPr/>
+        </p:nvSpPr>
+        <p:spPr>
+          <a:xfrm>
+            <a:off x="1062288" y="1987084"/>
+            <a:ext cx="1140828" cy="184666"/>
+          </a:xfrm>
+          <a:prstGeom prst="rect">
+            <a:avLst/>
+          </a:prstGeom>
+          <a:solidFill>
+            <a:schemeClr val="bg1"/>
+          </a:solidFill>
+          <a:ln w="3175">
+            <a:solidFill>
+              <a:schemeClr val="tx1"/>
+            </a:solidFill>
+          </a:ln>
+        </p:spPr>
+        <p:txBody>
+          <a:bodyPr wrap="square" rtlCol="0">
+            <a:spAutoFit/>
+          </a:bodyPr>
+          <a:lstStyle/>
+          <a:p>
+            <a:pPr algn="ctr"/>
+            <a:r>
+              <a:rPr lang="en-US" sz="600" dirty="0">
+                <a:latin typeface="NewComputerModern08" pitchFamily="2" charset="77"/>
+                <a:cs typeface="Times New Roman" panose="02020603050405020304" pitchFamily="18" charset="0"/>
+              </a:rPr>
+              <a:t>Ballot selected for auditing</a:t>
+            </a:r>
+          </a:p>
+        </p:txBody>
+      </p:sp>
+      <p:cxnSp>
+        <p:nvCxnSpPr>
+          <p:cNvPr id="97" name="Straight Arrow Connector 96">
+            <a:extLst>
+              <a:ext uri="{FF2B5EF4-FFF2-40B4-BE49-F238E27FC236}">
+                <a16:creationId xmlns:a16="http://schemas.microsoft.com/office/drawing/2014/main" id="{25026074-629B-E150-6D8E-1B06295C6C62}"/>
+              </a:ext>
+            </a:extLst>
+          </p:cNvPr>
+          <p:cNvCxnSpPr>
+            <a:cxnSpLocks/>
+          </p:cNvCxnSpPr>
+          <p:nvPr/>
+        </p:nvCxnSpPr>
+        <p:spPr>
+          <a:xfrm>
+            <a:off x="606948" y="2078257"/>
+            <a:ext cx="455340" cy="0"/>
+          </a:xfrm>
+          <a:prstGeom prst="straightConnector1">
+            <a:avLst/>
+          </a:prstGeom>
+          <a:ln w="9525">
+            <a:solidFill>
+              <a:schemeClr val="tx1">
+                <a:lumMod val="65000"/>
+                <a:lumOff val="35000"/>
+              </a:schemeClr>
+            </a:solidFill>
+            <a:tailEnd type="triangle" w="sm" len="med"/>
+          </a:ln>
+        </p:spPr>
+        <p:style>
+          <a:lnRef idx="2">
+            <a:schemeClr val="accent1"/>
+          </a:lnRef>
+          <a:fillRef idx="0">
+            <a:schemeClr val="accent1"/>
+          </a:fillRef>
+          <a:effectRef idx="1">
+            <a:schemeClr val="accent1"/>
+          </a:effectRef>
+          <a:fontRef idx="minor">
+            <a:schemeClr val="tx1"/>
+          </a:fontRef>
+        </p:style>
+      </p:cxnSp>
+      <p:sp>
+        <p:nvSpPr>
+          <p:cNvPr id="104" name="TextBox 103">
+            <a:extLst>
+              <a:ext uri="{FF2B5EF4-FFF2-40B4-BE49-F238E27FC236}">
+                <a16:creationId xmlns:a16="http://schemas.microsoft.com/office/drawing/2014/main" id="{54EAC70E-1FAB-8835-7E53-9441286F38FB}"/>
+              </a:ext>
+            </a:extLst>
+          </p:cNvPr>
+          <p:cNvSpPr txBox="1"/>
+          <p:nvPr/>
+        </p:nvSpPr>
+        <p:spPr>
+          <a:xfrm>
+            <a:off x="1323162" y="2232904"/>
+            <a:ext cx="619080" cy="184666"/>
+          </a:xfrm>
+          <a:prstGeom prst="rect">
+            <a:avLst/>
+          </a:prstGeom>
+          <a:noFill/>
+        </p:spPr>
+        <p:txBody>
+          <a:bodyPr wrap="none" rtlCol="0">
+            <a:spAutoFit/>
+          </a:bodyPr>
+          <a:lstStyle/>
+          <a:p>
+            <a:r>
+              <a:rPr lang="en-US" sz="600" b="1" dirty="0">
+                <a:latin typeface="NewComputerModern08" pitchFamily="2" charset="77"/>
+              </a:rPr>
+              <a:t>Ballot Data</a:t>
+            </a:r>
+          </a:p>
+        </p:txBody>
+      </p:sp>
+      <p:sp>
+        <p:nvSpPr>
+          <p:cNvPr id="109" name="Rounded Rectangle 108">
+            <a:extLst>
+              <a:ext uri="{FF2B5EF4-FFF2-40B4-BE49-F238E27FC236}">
+                <a16:creationId xmlns:a16="http://schemas.microsoft.com/office/drawing/2014/main" id="{E64829C2-3DC2-AAD5-0A8A-9E35667AB9C4}"/>
+              </a:ext>
+            </a:extLst>
+          </p:cNvPr>
+          <p:cNvSpPr/>
+          <p:nvPr/>
+        </p:nvSpPr>
+        <p:spPr>
+          <a:xfrm>
+            <a:off x="2595697" y="1756252"/>
+            <a:ext cx="2119832" cy="2646456"/>
+          </a:xfrm>
+          <a:prstGeom prst="roundRect">
+            <a:avLst>
+              <a:gd name="adj" fmla="val 3202"/>
+            </a:avLst>
+          </a:prstGeom>
+          <a:solidFill>
+            <a:srgbClr val="FBFF00">
+              <a:alpha val="12157"/>
+            </a:srgbClr>
+          </a:solidFill>
+          <a:ln w="6350">
+            <a:solidFill>
+              <a:schemeClr val="bg1">
+                <a:lumMod val="50000"/>
+              </a:schemeClr>
+            </a:solidFill>
+            <a:prstDash val="dash"/>
+          </a:ln>
+        </p:spPr>
+        <p:style>
+          <a:lnRef idx="2">
+            <a:schemeClr val="accent1">
+              <a:shade val="15000"/>
+            </a:schemeClr>
+          </a:lnRef>
+          <a:fillRef idx="1">
+            <a:schemeClr val="accent1"/>
+          </a:fillRef>
+          <a:effectRef idx="0">
+            <a:schemeClr val="accent1"/>
+          </a:effectRef>
+          <a:fontRef idx="minor">
+            <a:schemeClr val="lt1"/>
+          </a:fontRef>
+        </p:style>
+        <p:txBody>
+          <a:bodyPr rtlCol="0" anchor="ctr"/>
+          <a:lstStyle/>
+          <a:p>
+            <a:pPr algn="ctr"/>
+            <a:endParaRPr lang="en-US"/>
+          </a:p>
+        </p:txBody>
+      </p:sp>
+      <p:sp>
+        <p:nvSpPr>
+          <p:cNvPr id="110" name="TextBox 109">
+            <a:extLst>
+              <a:ext uri="{FF2B5EF4-FFF2-40B4-BE49-F238E27FC236}">
+                <a16:creationId xmlns:a16="http://schemas.microsoft.com/office/drawing/2014/main" id="{DB096C98-FD8E-F0FB-3A10-3B8CE03529D6}"/>
+              </a:ext>
+            </a:extLst>
+          </p:cNvPr>
+          <p:cNvSpPr txBox="1"/>
+          <p:nvPr/>
+        </p:nvSpPr>
+        <p:spPr>
+          <a:xfrm>
+            <a:off x="3002586" y="1663918"/>
+            <a:ext cx="1306054" cy="184666"/>
+          </a:xfrm>
+          <a:prstGeom prst="rect">
+            <a:avLst/>
+          </a:prstGeom>
+          <a:solidFill>
+            <a:schemeClr val="bg1"/>
+          </a:solidFill>
+          <a:ln w="6350">
+            <a:solidFill>
+              <a:schemeClr val="tx1"/>
+            </a:solidFill>
+          </a:ln>
+        </p:spPr>
+        <p:txBody>
+          <a:bodyPr wrap="square" rtlCol="0">
+            <a:spAutoFit/>
+          </a:bodyPr>
+          <a:lstStyle/>
+          <a:p>
+            <a:pPr algn="ctr"/>
+            <a:r>
+              <a:rPr lang="en-US" sz="600" b="1" dirty="0">
+                <a:latin typeface="NewComputerModern08" pitchFamily="2" charset="77"/>
+                <a:cs typeface="Times New Roman" panose="02020603050405020304" pitchFamily="18" charset="0"/>
+              </a:rPr>
+              <a:t>Off-chain proof</a:t>
+            </a:r>
+            <a:endParaRPr lang="en-US" sz="1050" b="1" dirty="0">
               <a:latin typeface="NewComputerModern08" pitchFamily="2" charset="77"/>
               <a:cs typeface="Times New Roman" panose="02020603050405020304" pitchFamily="18" charset="0"/>
             </a:endParaRPr>
           </a:p>
         </p:txBody>
       </p:sp>
+      <p:sp>
+        <p:nvSpPr>
+          <p:cNvPr id="123" name="Rounded Rectangle 122">
+            <a:extLst>
+              <a:ext uri="{FF2B5EF4-FFF2-40B4-BE49-F238E27FC236}">
+                <a16:creationId xmlns:a16="http://schemas.microsoft.com/office/drawing/2014/main" id="{E15B9F11-63FA-7268-01DA-36E0D3C8A551}"/>
+              </a:ext>
+            </a:extLst>
+          </p:cNvPr>
+          <p:cNvSpPr/>
+          <p:nvPr/>
+        </p:nvSpPr>
+        <p:spPr>
+          <a:xfrm>
+            <a:off x="1244973" y="3042256"/>
+            <a:ext cx="1082896" cy="145267"/>
+          </a:xfrm>
+          <a:prstGeom prst="roundRect">
+            <a:avLst>
+              <a:gd name="adj" fmla="val 0"/>
+            </a:avLst>
+          </a:prstGeom>
+          <a:solidFill>
+            <a:srgbClr val="91AEFF">
+              <a:alpha val="32941"/>
+            </a:srgbClr>
+          </a:solidFill>
+          <a:ln w="6350">
+            <a:solidFill>
+              <a:schemeClr val="tx1">
+                <a:lumMod val="50000"/>
+                <a:lumOff val="50000"/>
+              </a:schemeClr>
+            </a:solidFill>
+            <a:prstDash val="solid"/>
+          </a:ln>
+        </p:spPr>
+        <p:style>
+          <a:lnRef idx="2">
+            <a:schemeClr val="accent1">
+              <a:shade val="15000"/>
+            </a:schemeClr>
+          </a:lnRef>
+          <a:fillRef idx="1">
+            <a:schemeClr val="accent1"/>
+          </a:fillRef>
+          <a:effectRef idx="0">
+            <a:schemeClr val="accent1"/>
+          </a:effectRef>
+          <a:fontRef idx="minor">
+            <a:schemeClr val="lt1"/>
+          </a:fontRef>
+        </p:style>
+        <p:txBody>
+          <a:bodyPr rtlCol="0" anchor="ctr"/>
+          <a:lstStyle/>
+          <a:p>
+            <a:pPr algn="ctr"/>
+            <a:r>
+              <a:rPr lang="en-US" sz="600" b="1" dirty="0">
+                <a:solidFill>
+                  <a:schemeClr val="tx1"/>
+                </a:solidFill>
+                <a:latin typeface="NewComputerModern08" pitchFamily="2" charset="77"/>
+                <a:cs typeface="Times New Roman" panose="02020603050405020304" pitchFamily="18" charset="0"/>
+              </a:rPr>
+              <a:t>Output</a:t>
+            </a:r>
+            <a:endParaRPr lang="en-US" sz="1400" b="1" dirty="0">
+              <a:solidFill>
+                <a:schemeClr val="tx1"/>
+              </a:solidFill>
+            </a:endParaRPr>
+          </a:p>
+        </p:txBody>
+      </p:sp>
+      <p:sp>
+        <p:nvSpPr>
+          <p:cNvPr id="124" name="Rounded Rectangle 123">
+            <a:extLst>
+              <a:ext uri="{FF2B5EF4-FFF2-40B4-BE49-F238E27FC236}">
+                <a16:creationId xmlns:a16="http://schemas.microsoft.com/office/drawing/2014/main" id="{3268C4C5-060F-6523-5654-D808955A3B25}"/>
+              </a:ext>
+            </a:extLst>
+          </p:cNvPr>
+          <p:cNvSpPr/>
+          <p:nvPr/>
+        </p:nvSpPr>
+        <p:spPr>
+          <a:xfrm>
+            <a:off x="1244972" y="3187523"/>
+            <a:ext cx="1082896" cy="299867"/>
+          </a:xfrm>
+          <a:prstGeom prst="roundRect">
+            <a:avLst>
+              <a:gd name="adj" fmla="val 0"/>
+            </a:avLst>
+          </a:prstGeom>
+          <a:noFill/>
+          <a:ln w="6350">
+            <a:solidFill>
+              <a:schemeClr val="tx1">
+                <a:lumMod val="50000"/>
+                <a:lumOff val="50000"/>
+              </a:schemeClr>
+            </a:solidFill>
+            <a:prstDash val="solid"/>
+          </a:ln>
+        </p:spPr>
+        <p:style>
+          <a:lnRef idx="2">
+            <a:schemeClr val="accent1">
+              <a:shade val="15000"/>
+            </a:schemeClr>
+          </a:lnRef>
+          <a:fillRef idx="1">
+            <a:schemeClr val="accent1"/>
+          </a:fillRef>
+          <a:effectRef idx="0">
+            <a:schemeClr val="accent1"/>
+          </a:effectRef>
+          <a:fontRef idx="minor">
+            <a:schemeClr val="lt1"/>
+          </a:fontRef>
+        </p:style>
+        <p:txBody>
+          <a:bodyPr rtlCol="0" anchor="ctr"/>
+          <a:lstStyle/>
+          <a:p>
+            <a:pPr algn="ctr"/>
+            <a:r>
+              <a:rPr lang="en-US" sz="600" dirty="0">
+                <a:solidFill>
+                  <a:schemeClr val="tx1"/>
+                </a:solidFill>
+                <a:latin typeface="NewComputerModern08" pitchFamily="2" charset="77"/>
+                <a:cs typeface="Times New Roman" panose="02020603050405020304" pitchFamily="18" charset="0"/>
+              </a:rPr>
+              <a:t>Conventional tabulator-derived tally and election night reporting</a:t>
+            </a:r>
+          </a:p>
+        </p:txBody>
+      </p:sp>
+      <p:cxnSp>
+        <p:nvCxnSpPr>
+          <p:cNvPr id="125" name="Straight Arrow Connector 124">
+            <a:extLst>
+              <a:ext uri="{FF2B5EF4-FFF2-40B4-BE49-F238E27FC236}">
+                <a16:creationId xmlns:a16="http://schemas.microsoft.com/office/drawing/2014/main" id="{EA20E735-C232-C4D1-B508-010DD7EB63C3}"/>
+              </a:ext>
+            </a:extLst>
+          </p:cNvPr>
+          <p:cNvCxnSpPr>
+            <a:cxnSpLocks/>
+          </p:cNvCxnSpPr>
+          <p:nvPr/>
+        </p:nvCxnSpPr>
+        <p:spPr>
+          <a:xfrm>
+            <a:off x="2032394" y="2751095"/>
+            <a:ext cx="0" cy="288394"/>
+          </a:xfrm>
+          <a:prstGeom prst="straightConnector1">
+            <a:avLst/>
+          </a:prstGeom>
+          <a:ln w="9525">
+            <a:solidFill>
+              <a:schemeClr val="tx1">
+                <a:lumMod val="65000"/>
+                <a:lumOff val="35000"/>
+              </a:schemeClr>
+            </a:solidFill>
+            <a:tailEnd type="triangle" w="sm" len="med"/>
+          </a:ln>
+        </p:spPr>
+        <p:style>
+          <a:lnRef idx="2">
+            <a:schemeClr val="accent1"/>
+          </a:lnRef>
+          <a:fillRef idx="0">
+            <a:schemeClr val="accent1"/>
+          </a:fillRef>
+          <a:effectRef idx="1">
+            <a:schemeClr val="accent1"/>
+          </a:effectRef>
+          <a:fontRef idx="minor">
+            <a:schemeClr val="tx1"/>
+          </a:fontRef>
+        </p:style>
+      </p:cxnSp>
+      <p:cxnSp>
+        <p:nvCxnSpPr>
+          <p:cNvPr id="133" name="Straight Arrow Connector 132">
+            <a:extLst>
+              <a:ext uri="{FF2B5EF4-FFF2-40B4-BE49-F238E27FC236}">
+                <a16:creationId xmlns:a16="http://schemas.microsoft.com/office/drawing/2014/main" id="{018BC5E4-22AE-2212-5EEF-1051ECA8196A}"/>
+              </a:ext>
+            </a:extLst>
+          </p:cNvPr>
+          <p:cNvCxnSpPr>
+            <a:cxnSpLocks/>
+          </p:cNvCxnSpPr>
+          <p:nvPr/>
+        </p:nvCxnSpPr>
+        <p:spPr>
+          <a:xfrm flipV="1">
+            <a:off x="2092459" y="1321371"/>
+            <a:ext cx="0" cy="225106"/>
+          </a:xfrm>
+          <a:prstGeom prst="straightConnector1">
+            <a:avLst/>
+          </a:prstGeom>
+          <a:ln w="9525">
+            <a:solidFill>
+              <a:schemeClr val="tx1">
+                <a:lumMod val="65000"/>
+                <a:lumOff val="35000"/>
+              </a:schemeClr>
+            </a:solidFill>
+            <a:tailEnd type="none" w="sm" len="med"/>
+          </a:ln>
+        </p:spPr>
+        <p:style>
+          <a:lnRef idx="2">
+            <a:schemeClr val="accent1"/>
+          </a:lnRef>
+          <a:fillRef idx="0">
+            <a:schemeClr val="accent1"/>
+          </a:fillRef>
+          <a:effectRef idx="1">
+            <a:schemeClr val="accent1"/>
+          </a:effectRef>
+          <a:fontRef idx="minor">
+            <a:schemeClr val="tx1"/>
+          </a:fontRef>
+        </p:style>
+      </p:cxnSp>
+      <p:cxnSp>
+        <p:nvCxnSpPr>
+          <p:cNvPr id="136" name="Straight Arrow Connector 135">
+            <a:extLst>
+              <a:ext uri="{FF2B5EF4-FFF2-40B4-BE49-F238E27FC236}">
+                <a16:creationId xmlns:a16="http://schemas.microsoft.com/office/drawing/2014/main" id="{49F01E15-8754-2C26-743B-E9DC10570CB4}"/>
+              </a:ext>
+            </a:extLst>
+          </p:cNvPr>
+          <p:cNvCxnSpPr>
+            <a:cxnSpLocks/>
+          </p:cNvCxnSpPr>
+          <p:nvPr/>
+        </p:nvCxnSpPr>
+        <p:spPr>
+          <a:xfrm flipH="1">
+            <a:off x="2092459" y="1546477"/>
+            <a:ext cx="2402857" cy="3566"/>
+          </a:xfrm>
+          <a:prstGeom prst="straightConnector1">
+            <a:avLst/>
+          </a:prstGeom>
+          <a:ln w="9525">
+            <a:solidFill>
+              <a:schemeClr val="tx1">
+                <a:lumMod val="65000"/>
+                <a:lumOff val="35000"/>
+              </a:schemeClr>
+            </a:solidFill>
+            <a:tailEnd type="none" w="sm" len="med"/>
+          </a:ln>
+        </p:spPr>
+        <p:style>
+          <a:lnRef idx="2">
+            <a:schemeClr val="accent1"/>
+          </a:lnRef>
+          <a:fillRef idx="0">
+            <a:schemeClr val="accent1"/>
+          </a:fillRef>
+          <a:effectRef idx="1">
+            <a:schemeClr val="accent1"/>
+          </a:effectRef>
+          <a:fontRef idx="minor">
+            <a:schemeClr val="tx1"/>
+          </a:fontRef>
+        </p:style>
+      </p:cxnSp>
+      <p:sp>
+        <p:nvSpPr>
+          <p:cNvPr id="154" name="TextBox 153">
+            <a:extLst>
+              <a:ext uri="{FF2B5EF4-FFF2-40B4-BE49-F238E27FC236}">
+                <a16:creationId xmlns:a16="http://schemas.microsoft.com/office/drawing/2014/main" id="{7026D4D1-A1CB-4E12-23E2-F3E63DA1D604}"/>
+              </a:ext>
+            </a:extLst>
+          </p:cNvPr>
+          <p:cNvSpPr txBox="1"/>
+          <p:nvPr/>
+        </p:nvSpPr>
+        <p:spPr>
+          <a:xfrm>
+            <a:off x="2700757" y="1922187"/>
+            <a:ext cx="1657347" cy="184666"/>
+          </a:xfrm>
+          <a:prstGeom prst="rect">
+            <a:avLst/>
+          </a:prstGeom>
+          <a:solidFill>
+            <a:schemeClr val="bg1"/>
+          </a:solidFill>
+          <a:ln w="3175">
+            <a:solidFill>
+              <a:schemeClr val="tx1"/>
+            </a:solidFill>
+          </a:ln>
+        </p:spPr>
+        <p:txBody>
+          <a:bodyPr wrap="square" rtlCol="0">
+            <a:spAutoFit/>
+          </a:bodyPr>
+          <a:lstStyle/>
+          <a:p>
+            <a:pPr algn="ctr"/>
+            <a:r>
+              <a:rPr lang="en-US" sz="600" dirty="0">
+                <a:latin typeface="NewComputerModern08" pitchFamily="2" charset="77"/>
+                <a:cs typeface="Times New Roman" panose="02020603050405020304" pitchFamily="18" charset="0"/>
+              </a:rPr>
+              <a:t>Populate </a:t>
+            </a:r>
+            <a:r>
+              <a:rPr lang="en-US" sz="600" dirty="0" err="1">
+                <a:latin typeface="NewComputerModern08" pitchFamily="2" charset="77"/>
+                <a:cs typeface="Times New Roman" panose="02020603050405020304" pitchFamily="18" charset="0"/>
+              </a:rPr>
+              <a:t>Zeeperio</a:t>
+            </a:r>
+            <a:r>
+              <a:rPr lang="en-US" sz="600" dirty="0">
+                <a:latin typeface="NewComputerModern08" pitchFamily="2" charset="77"/>
+                <a:cs typeface="Times New Roman" panose="02020603050405020304" pitchFamily="18" charset="0"/>
+              </a:rPr>
+              <a:t> table with ballot data</a:t>
+            </a:r>
+          </a:p>
+        </p:txBody>
+      </p:sp>
+      <p:cxnSp>
+        <p:nvCxnSpPr>
+          <p:cNvPr id="155" name="Straight Arrow Connector 154">
+            <a:extLst>
+              <a:ext uri="{FF2B5EF4-FFF2-40B4-BE49-F238E27FC236}">
+                <a16:creationId xmlns:a16="http://schemas.microsoft.com/office/drawing/2014/main" id="{044AE081-D053-46EA-6AB4-95FC91619AF1}"/>
+              </a:ext>
+            </a:extLst>
+          </p:cNvPr>
+          <p:cNvCxnSpPr>
+            <a:cxnSpLocks/>
+            <a:endCxn id="154" idx="1"/>
+          </p:cNvCxnSpPr>
+          <p:nvPr/>
+        </p:nvCxnSpPr>
+        <p:spPr>
+          <a:xfrm>
+            <a:off x="2323738" y="2014520"/>
+            <a:ext cx="377019" cy="0"/>
+          </a:xfrm>
+          <a:prstGeom prst="straightConnector1">
+            <a:avLst/>
+          </a:prstGeom>
+          <a:ln w="9525">
+            <a:solidFill>
+              <a:schemeClr val="tx1">
+                <a:lumMod val="65000"/>
+                <a:lumOff val="35000"/>
+              </a:schemeClr>
+            </a:solidFill>
+            <a:tailEnd type="triangle" w="sm" len="med"/>
+          </a:ln>
+        </p:spPr>
+        <p:style>
+          <a:lnRef idx="2">
+            <a:schemeClr val="accent1"/>
+          </a:lnRef>
+          <a:fillRef idx="0">
+            <a:schemeClr val="accent1"/>
+          </a:fillRef>
+          <a:effectRef idx="1">
+            <a:schemeClr val="accent1"/>
+          </a:effectRef>
+          <a:fontRef idx="minor">
+            <a:schemeClr val="tx1"/>
+          </a:fontRef>
+        </p:style>
+      </p:cxnSp>
+      <p:sp>
+        <p:nvSpPr>
+          <p:cNvPr id="163" name="TextBox 162">
+            <a:extLst>
+              <a:ext uri="{FF2B5EF4-FFF2-40B4-BE49-F238E27FC236}">
+                <a16:creationId xmlns:a16="http://schemas.microsoft.com/office/drawing/2014/main" id="{4117E5A9-B92B-EBAB-CA64-667D0CF2E18A}"/>
+              </a:ext>
+            </a:extLst>
+          </p:cNvPr>
+          <p:cNvSpPr txBox="1"/>
+          <p:nvPr/>
+        </p:nvSpPr>
+        <p:spPr>
+          <a:xfrm>
+            <a:off x="2693773" y="2226310"/>
+            <a:ext cx="1934307" cy="841256"/>
+          </a:xfrm>
+          <a:prstGeom prst="rect">
+            <a:avLst/>
+          </a:prstGeom>
+          <a:solidFill>
+            <a:schemeClr val="bg1"/>
+          </a:solidFill>
+          <a:ln w="3175">
+            <a:solidFill>
+              <a:schemeClr val="tx1"/>
+            </a:solidFill>
+          </a:ln>
+        </p:spPr>
+        <p:txBody>
+          <a:bodyPr wrap="square" rtlCol="0">
+            <a:spAutoFit/>
+          </a:bodyPr>
+          <a:lstStyle/>
+          <a:p>
+            <a:pPr marL="228600" indent="-228600">
+              <a:spcAft>
+                <a:spcPts val="400"/>
+              </a:spcAft>
+              <a:buFont typeface="+mj-lt"/>
+              <a:buAutoNum type="arabicPeriod"/>
+            </a:pPr>
+            <a:r>
+              <a:rPr lang="en-US" sz="600" b="1" dirty="0">
+                <a:latin typeface="NewComputerModern08" pitchFamily="2" charset="77"/>
+                <a:cs typeface="Times New Roman" panose="02020603050405020304" pitchFamily="18" charset="0"/>
+              </a:rPr>
+              <a:t>Main proof</a:t>
+            </a:r>
+            <a:r>
+              <a:rPr lang="en-US" sz="600" dirty="0">
+                <a:latin typeface="NewComputerModern08" pitchFamily="2" charset="77"/>
+                <a:cs typeface="Times New Roman" panose="02020603050405020304" pitchFamily="18" charset="0"/>
+              </a:rPr>
+              <a:t>: Prove ballot constraints hold and tally is correct</a:t>
+            </a:r>
+          </a:p>
+          <a:p>
+            <a:pPr marL="228600" indent="-228600">
+              <a:spcAft>
+                <a:spcPts val="400"/>
+              </a:spcAft>
+              <a:buFont typeface="+mj-lt"/>
+              <a:buAutoNum type="arabicPeriod"/>
+            </a:pPr>
+            <a:r>
+              <a:rPr lang="en-US" sz="600" b="1" dirty="0">
+                <a:latin typeface="NewComputerModern08" pitchFamily="2" charset="77"/>
+                <a:cs typeface="Times New Roman" panose="02020603050405020304" pitchFamily="18" charset="0"/>
+              </a:rPr>
+              <a:t>Receipt shuffle proof</a:t>
+            </a:r>
+            <a:r>
+              <a:rPr lang="en-US" sz="600" dirty="0">
+                <a:latin typeface="NewComputerModern08" pitchFamily="2" charset="77"/>
+                <a:cs typeface="Times New Roman" panose="02020603050405020304" pitchFamily="18" charset="0"/>
+              </a:rPr>
+              <a:t>: Apply secret shuffle to </a:t>
+            </a:r>
+            <a:r>
+              <a:rPr lang="en-US" sz="600" dirty="0" err="1">
+                <a:latin typeface="NewComputerModern08" pitchFamily="2" charset="77"/>
+                <a:cs typeface="Times New Roman" panose="02020603050405020304" pitchFamily="18" charset="0"/>
+              </a:rPr>
+              <a:t>Zeeperio</a:t>
+            </a:r>
+            <a:r>
+              <a:rPr lang="en-US" sz="600" dirty="0">
+                <a:latin typeface="NewComputerModern08" pitchFamily="2" charset="77"/>
+                <a:cs typeface="Times New Roman" panose="02020603050405020304" pitchFamily="18" charset="0"/>
+              </a:rPr>
+              <a:t> table columns and prove output is a valid permutation of original</a:t>
+            </a:r>
+          </a:p>
+          <a:p>
+            <a:pPr marL="228600" indent="-228600">
+              <a:spcAft>
+                <a:spcPts val="400"/>
+              </a:spcAft>
+              <a:buFont typeface="+mj-lt"/>
+              <a:buAutoNum type="arabicPeriod"/>
+            </a:pPr>
+            <a:r>
+              <a:rPr lang="en-US" sz="600" b="1" dirty="0">
+                <a:latin typeface="NewComputerModern08" pitchFamily="2" charset="77"/>
+                <a:cs typeface="Times New Roman" panose="02020603050405020304" pitchFamily="18" charset="0"/>
+              </a:rPr>
+              <a:t>Dispute proof</a:t>
+            </a:r>
+            <a:r>
+              <a:rPr lang="en-US" sz="600" dirty="0">
+                <a:latin typeface="NewComputerModern08" pitchFamily="2" charset="77"/>
+                <a:cs typeface="Times New Roman" panose="02020603050405020304" pitchFamily="18" charset="0"/>
+              </a:rPr>
+              <a:t>: Ballot id and disputed code are not included in tally (per dispute)</a:t>
+            </a:r>
+          </a:p>
+        </p:txBody>
+      </p:sp>
+      <p:cxnSp>
+        <p:nvCxnSpPr>
+          <p:cNvPr id="164" name="Straight Arrow Connector 163">
+            <a:extLst>
+              <a:ext uri="{FF2B5EF4-FFF2-40B4-BE49-F238E27FC236}">
+                <a16:creationId xmlns:a16="http://schemas.microsoft.com/office/drawing/2014/main" id="{111AA688-4F2F-DA61-5575-896A74E57A05}"/>
+              </a:ext>
+            </a:extLst>
+          </p:cNvPr>
+          <p:cNvCxnSpPr>
+            <a:cxnSpLocks/>
+          </p:cNvCxnSpPr>
+          <p:nvPr/>
+        </p:nvCxnSpPr>
+        <p:spPr>
+          <a:xfrm>
+            <a:off x="4495316" y="1546477"/>
+            <a:ext cx="0" cy="679833"/>
+          </a:xfrm>
+          <a:prstGeom prst="straightConnector1">
+            <a:avLst/>
+          </a:prstGeom>
+          <a:ln w="9525">
+            <a:solidFill>
+              <a:schemeClr val="tx1">
+                <a:lumMod val="65000"/>
+                <a:lumOff val="35000"/>
+              </a:schemeClr>
+            </a:solidFill>
+            <a:tailEnd type="triangle" w="sm" len="med"/>
+          </a:ln>
+        </p:spPr>
+        <p:style>
+          <a:lnRef idx="2">
+            <a:schemeClr val="accent1"/>
+          </a:lnRef>
+          <a:fillRef idx="0">
+            <a:schemeClr val="accent1"/>
+          </a:fillRef>
+          <a:effectRef idx="1">
+            <a:schemeClr val="accent1"/>
+          </a:effectRef>
+          <a:fontRef idx="minor">
+            <a:schemeClr val="tx1"/>
+          </a:fontRef>
+        </p:style>
+      </p:cxnSp>
+      <p:cxnSp>
+        <p:nvCxnSpPr>
+          <p:cNvPr id="166" name="Straight Arrow Connector 165">
+            <a:extLst>
+              <a:ext uri="{FF2B5EF4-FFF2-40B4-BE49-F238E27FC236}">
+                <a16:creationId xmlns:a16="http://schemas.microsoft.com/office/drawing/2014/main" id="{8B6DA3D3-7736-D874-C3C5-4DD7E23C99B1}"/>
+              </a:ext>
+            </a:extLst>
+          </p:cNvPr>
+          <p:cNvCxnSpPr>
+            <a:cxnSpLocks/>
+          </p:cNvCxnSpPr>
+          <p:nvPr/>
+        </p:nvCxnSpPr>
+        <p:spPr>
+          <a:xfrm flipH="1">
+            <a:off x="3655613" y="2110701"/>
+            <a:ext cx="1" cy="126051"/>
+          </a:xfrm>
+          <a:prstGeom prst="straightConnector1">
+            <a:avLst/>
+          </a:prstGeom>
+          <a:ln w="9525">
+            <a:solidFill>
+              <a:schemeClr val="tx1">
+                <a:lumMod val="65000"/>
+                <a:lumOff val="35000"/>
+              </a:schemeClr>
+            </a:solidFill>
+            <a:tailEnd type="triangle" w="sm" len="med"/>
+          </a:ln>
+        </p:spPr>
+        <p:style>
+          <a:lnRef idx="2">
+            <a:schemeClr val="accent1"/>
+          </a:lnRef>
+          <a:fillRef idx="0">
+            <a:schemeClr val="accent1"/>
+          </a:fillRef>
+          <a:effectRef idx="1">
+            <a:schemeClr val="accent1"/>
+          </a:effectRef>
+          <a:fontRef idx="minor">
+            <a:schemeClr val="tx1"/>
+          </a:fontRef>
+        </p:style>
+      </p:cxnSp>
+      <p:sp>
+        <p:nvSpPr>
+          <p:cNvPr id="172" name="TextBox 171">
+            <a:extLst>
+              <a:ext uri="{FF2B5EF4-FFF2-40B4-BE49-F238E27FC236}">
+                <a16:creationId xmlns:a16="http://schemas.microsoft.com/office/drawing/2014/main" id="{60647B25-8F17-4F05-F49E-B9A024AC41B1}"/>
+              </a:ext>
+            </a:extLst>
+          </p:cNvPr>
+          <p:cNvSpPr txBox="1"/>
+          <p:nvPr/>
+        </p:nvSpPr>
+        <p:spPr>
+          <a:xfrm>
+            <a:off x="2692059" y="3250243"/>
+            <a:ext cx="1934307" cy="1036181"/>
+          </a:xfrm>
+          <a:prstGeom prst="rect">
+            <a:avLst/>
+          </a:prstGeom>
+          <a:solidFill>
+            <a:schemeClr val="bg1"/>
+          </a:solidFill>
+          <a:ln w="3175">
+            <a:solidFill>
+              <a:schemeClr val="tx1"/>
+            </a:solidFill>
+          </a:ln>
+        </p:spPr>
+        <p:txBody>
+          <a:bodyPr wrap="square" rtlCol="0">
+            <a:spAutoFit/>
+          </a:bodyPr>
+          <a:lstStyle/>
+          <a:p>
+            <a:pPr marL="228600" indent="-228600">
+              <a:spcAft>
+                <a:spcPts val="400"/>
+              </a:spcAft>
+              <a:buFont typeface="+mj-lt"/>
+              <a:buAutoNum type="arabicPeriod"/>
+            </a:pPr>
+            <a:r>
+              <a:rPr lang="en-US" sz="600" dirty="0">
+                <a:latin typeface="NewComputerModern08" pitchFamily="2" charset="77"/>
+                <a:cs typeface="Times New Roman" panose="02020603050405020304" pitchFamily="18" charset="0"/>
+              </a:rPr>
+              <a:t>Interpolate </a:t>
+            </a:r>
+            <a:r>
+              <a:rPr lang="en-US" sz="600" dirty="0" err="1">
+                <a:latin typeface="NewComputerModern08" pitchFamily="2" charset="77"/>
+                <a:cs typeface="Times New Roman" panose="02020603050405020304" pitchFamily="18" charset="0"/>
+              </a:rPr>
+              <a:t>Zeeperio</a:t>
+            </a:r>
+            <a:r>
+              <a:rPr lang="en-US" sz="600" dirty="0">
+                <a:latin typeface="NewComputerModern08" pitchFamily="2" charset="77"/>
+                <a:cs typeface="Times New Roman" panose="02020603050405020304" pitchFamily="18" charset="0"/>
+              </a:rPr>
+              <a:t> table columns</a:t>
+            </a:r>
+          </a:p>
+          <a:p>
+            <a:pPr marL="228600" indent="-228600">
+              <a:spcAft>
+                <a:spcPts val="400"/>
+              </a:spcAft>
+              <a:buFont typeface="+mj-lt"/>
+              <a:buAutoNum type="arabicPeriod"/>
+            </a:pPr>
+            <a:r>
+              <a:rPr lang="en-US" sz="600" dirty="0">
+                <a:latin typeface="NewComputerModern08" pitchFamily="2" charset="77"/>
+                <a:cs typeface="Times New Roman" panose="02020603050405020304" pitchFamily="18" charset="0"/>
+              </a:rPr>
+              <a:t>Commit witness polynomials (hiding KZG and off-domain masking)</a:t>
+            </a:r>
+          </a:p>
+          <a:p>
+            <a:pPr marL="228600" indent="-228600">
+              <a:spcAft>
+                <a:spcPts val="400"/>
+              </a:spcAft>
+              <a:buFont typeface="+mj-lt"/>
+              <a:buAutoNum type="arabicPeriod"/>
+            </a:pPr>
+            <a:r>
+              <a:rPr lang="en-US" sz="600" dirty="0">
+                <a:latin typeface="NewComputerModern08" pitchFamily="2" charset="77"/>
+                <a:cs typeface="Times New Roman" panose="02020603050405020304" pitchFamily="18" charset="0"/>
+              </a:rPr>
+              <a:t>Derive Fiat-Shamir challenges</a:t>
+            </a:r>
+          </a:p>
+          <a:p>
+            <a:pPr marL="228600" indent="-228600">
+              <a:spcAft>
+                <a:spcPts val="400"/>
+              </a:spcAft>
+              <a:buFont typeface="+mj-lt"/>
+              <a:buAutoNum type="arabicPeriod"/>
+            </a:pPr>
+            <a:r>
+              <a:rPr lang="en-US" sz="600" dirty="0">
+                <a:latin typeface="NewComputerModern08" pitchFamily="2" charset="77"/>
+                <a:cs typeface="Times New Roman" panose="02020603050405020304" pitchFamily="18" charset="0"/>
+              </a:rPr>
+              <a:t>Compute constraint checks and generate batched KZG openings</a:t>
+            </a:r>
+          </a:p>
+          <a:p>
+            <a:pPr marL="228600" indent="-228600">
+              <a:spcAft>
+                <a:spcPts val="400"/>
+              </a:spcAft>
+              <a:buFont typeface="+mj-lt"/>
+              <a:buAutoNum type="arabicPeriod"/>
+            </a:pPr>
+            <a:r>
+              <a:rPr lang="en-US" sz="600" dirty="0">
+                <a:latin typeface="NewComputerModern08" pitchFamily="2" charset="77"/>
+                <a:cs typeface="Times New Roman" panose="02020603050405020304" pitchFamily="18" charset="0"/>
+              </a:rPr>
+              <a:t>Serialize proof as single ABI-encoded bytes payload</a:t>
+            </a:r>
+          </a:p>
+        </p:txBody>
+      </p:sp>
+      <p:cxnSp>
+        <p:nvCxnSpPr>
+          <p:cNvPr id="173" name="Straight Arrow Connector 172">
+            <a:extLst>
+              <a:ext uri="{FF2B5EF4-FFF2-40B4-BE49-F238E27FC236}">
+                <a16:creationId xmlns:a16="http://schemas.microsoft.com/office/drawing/2014/main" id="{1C7F6C89-D82C-70A1-6654-3BD5EFA6BEBE}"/>
+              </a:ext>
+            </a:extLst>
+          </p:cNvPr>
+          <p:cNvCxnSpPr>
+            <a:cxnSpLocks/>
+            <a:stCxn id="163" idx="2"/>
+            <a:endCxn id="172" idx="0"/>
+          </p:cNvCxnSpPr>
+          <p:nvPr/>
+        </p:nvCxnSpPr>
+        <p:spPr>
+          <a:xfrm flipH="1">
+            <a:off x="3659213" y="3067566"/>
+            <a:ext cx="1714" cy="182677"/>
+          </a:xfrm>
+          <a:prstGeom prst="straightConnector1">
+            <a:avLst/>
+          </a:prstGeom>
+          <a:ln w="9525">
+            <a:solidFill>
+              <a:schemeClr val="tx1">
+                <a:lumMod val="65000"/>
+                <a:lumOff val="35000"/>
+              </a:schemeClr>
+            </a:solidFill>
+            <a:tailEnd type="triangle" w="sm" len="med"/>
+          </a:ln>
+        </p:spPr>
+        <p:style>
+          <a:lnRef idx="2">
+            <a:schemeClr val="accent1"/>
+          </a:lnRef>
+          <a:fillRef idx="0">
+            <a:schemeClr val="accent1"/>
+          </a:fillRef>
+          <a:effectRef idx="1">
+            <a:schemeClr val="accent1"/>
+          </a:effectRef>
+          <a:fontRef idx="minor">
+            <a:schemeClr val="tx1"/>
+          </a:fontRef>
+        </p:style>
+      </p:cxnSp>
+      <p:sp>
+        <p:nvSpPr>
+          <p:cNvPr id="184" name="Rounded Rectangle 183">
+            <a:extLst>
+              <a:ext uri="{FF2B5EF4-FFF2-40B4-BE49-F238E27FC236}">
+                <a16:creationId xmlns:a16="http://schemas.microsoft.com/office/drawing/2014/main" id="{C9788D8A-CFB1-4531-D1FA-2CB888B19B22}"/>
+              </a:ext>
+            </a:extLst>
+          </p:cNvPr>
+          <p:cNvSpPr/>
+          <p:nvPr/>
+        </p:nvSpPr>
+        <p:spPr>
+          <a:xfrm>
+            <a:off x="2595697" y="4730757"/>
+            <a:ext cx="2119832" cy="1109892"/>
+          </a:xfrm>
+          <a:prstGeom prst="roundRect">
+            <a:avLst>
+              <a:gd name="adj" fmla="val 3202"/>
+            </a:avLst>
+          </a:prstGeom>
+          <a:solidFill>
+            <a:srgbClr val="FBFF00">
+              <a:alpha val="12157"/>
+            </a:srgbClr>
+          </a:solidFill>
+          <a:ln w="6350">
+            <a:solidFill>
+              <a:schemeClr val="bg1">
+                <a:lumMod val="50000"/>
+              </a:schemeClr>
+            </a:solidFill>
+            <a:prstDash val="dash"/>
+          </a:ln>
+        </p:spPr>
+        <p:style>
+          <a:lnRef idx="2">
+            <a:schemeClr val="accent1">
+              <a:shade val="15000"/>
+            </a:schemeClr>
+          </a:lnRef>
+          <a:fillRef idx="1">
+            <a:schemeClr val="accent1"/>
+          </a:fillRef>
+          <a:effectRef idx="0">
+            <a:schemeClr val="accent1"/>
+          </a:effectRef>
+          <a:fontRef idx="minor">
+            <a:schemeClr val="lt1"/>
+          </a:fontRef>
+        </p:style>
+        <p:txBody>
+          <a:bodyPr rtlCol="0" anchor="ctr"/>
+          <a:lstStyle/>
+          <a:p>
+            <a:pPr algn="ctr"/>
+            <a:endParaRPr lang="en-US"/>
+          </a:p>
+        </p:txBody>
+      </p:sp>
+      <p:sp>
+        <p:nvSpPr>
+          <p:cNvPr id="185" name="TextBox 184">
+            <a:extLst>
+              <a:ext uri="{FF2B5EF4-FFF2-40B4-BE49-F238E27FC236}">
+                <a16:creationId xmlns:a16="http://schemas.microsoft.com/office/drawing/2014/main" id="{1B380891-5AAA-10D7-9716-0DACAC9945A5}"/>
+              </a:ext>
+            </a:extLst>
+          </p:cNvPr>
+          <p:cNvSpPr txBox="1"/>
+          <p:nvPr/>
+        </p:nvSpPr>
+        <p:spPr>
+          <a:xfrm>
+            <a:off x="3002586" y="4638422"/>
+            <a:ext cx="1306054" cy="184666"/>
+          </a:xfrm>
+          <a:prstGeom prst="rect">
+            <a:avLst/>
+          </a:prstGeom>
+          <a:solidFill>
+            <a:schemeClr val="bg1"/>
+          </a:solidFill>
+          <a:ln w="6350">
+            <a:solidFill>
+              <a:schemeClr val="tx1"/>
+            </a:solidFill>
+          </a:ln>
+        </p:spPr>
+        <p:txBody>
+          <a:bodyPr wrap="square" rtlCol="0">
+            <a:spAutoFit/>
+          </a:bodyPr>
+          <a:lstStyle/>
+          <a:p>
+            <a:pPr algn="ctr"/>
+            <a:r>
+              <a:rPr lang="en-US" sz="600" b="1" dirty="0">
+                <a:latin typeface="NewComputerModern08" pitchFamily="2" charset="77"/>
+                <a:cs typeface="Times New Roman" panose="02020603050405020304" pitchFamily="18" charset="0"/>
+              </a:rPr>
+              <a:t>On-chain verification</a:t>
+            </a:r>
+            <a:endParaRPr lang="en-US" sz="1050" b="1" dirty="0">
+              <a:latin typeface="NewComputerModern08" pitchFamily="2" charset="77"/>
+              <a:cs typeface="Times New Roman" panose="02020603050405020304" pitchFamily="18" charset="0"/>
+            </a:endParaRPr>
+          </a:p>
+        </p:txBody>
+      </p:sp>
+      <p:sp>
+        <p:nvSpPr>
+          <p:cNvPr id="186" name="TextBox 185">
+            <a:extLst>
+              <a:ext uri="{FF2B5EF4-FFF2-40B4-BE49-F238E27FC236}">
+                <a16:creationId xmlns:a16="http://schemas.microsoft.com/office/drawing/2014/main" id="{0E5EB807-FBCC-CAE9-A6BF-0EB5477B3D9A}"/>
+              </a:ext>
+            </a:extLst>
+          </p:cNvPr>
+          <p:cNvSpPr txBox="1"/>
+          <p:nvPr/>
+        </p:nvSpPr>
+        <p:spPr>
+          <a:xfrm>
+            <a:off x="2700757" y="4918184"/>
+            <a:ext cx="1934307" cy="800219"/>
+          </a:xfrm>
+          <a:prstGeom prst="rect">
+            <a:avLst/>
+          </a:prstGeom>
+          <a:solidFill>
+            <a:schemeClr val="bg1"/>
+          </a:solidFill>
+          <a:ln w="3175">
+            <a:solidFill>
+              <a:schemeClr val="tx1"/>
+            </a:solidFill>
+          </a:ln>
+        </p:spPr>
+        <p:txBody>
+          <a:bodyPr wrap="square" rtlCol="0">
+            <a:spAutoFit/>
+          </a:bodyPr>
+          <a:lstStyle/>
+          <a:p>
+            <a:pPr marL="228600" indent="-228600">
+              <a:spcAft>
+                <a:spcPts val="400"/>
+              </a:spcAft>
+              <a:buFont typeface="+mj-lt"/>
+              <a:buAutoNum type="arabicPeriod"/>
+            </a:pPr>
+            <a:r>
+              <a:rPr lang="en-US" sz="600" dirty="0">
+                <a:latin typeface="NewComputerModern08" pitchFamily="2" charset="77"/>
+                <a:cs typeface="Times New Roman" panose="02020603050405020304" pitchFamily="18" charset="0"/>
+              </a:rPr>
+              <a:t>Submit </a:t>
+            </a:r>
+            <a:r>
+              <a:rPr lang="en-US" sz="600" dirty="0" err="1">
+                <a:latin typeface="NewComputerModern08" pitchFamily="2" charset="77"/>
+                <a:cs typeface="Times New Roman" panose="02020603050405020304" pitchFamily="18" charset="0"/>
+              </a:rPr>
+              <a:t>tx</a:t>
+            </a:r>
+            <a:r>
+              <a:rPr lang="en-US" sz="600" dirty="0">
+                <a:latin typeface="NewComputerModern08" pitchFamily="2" charset="77"/>
+                <a:cs typeface="Times New Roman" panose="02020603050405020304" pitchFamily="18" charset="0"/>
+              </a:rPr>
+              <a:t> call </a:t>
+            </a:r>
+            <a:r>
+              <a:rPr lang="en-US" sz="600" dirty="0" err="1">
+                <a:latin typeface="NewComputerModern08" pitchFamily="2" charset="77"/>
+                <a:cs typeface="Times New Roman" panose="02020603050405020304" pitchFamily="18" charset="0"/>
+              </a:rPr>
+              <a:t>cata</a:t>
+            </a:r>
+            <a:r>
+              <a:rPr lang="en-US" sz="600" dirty="0">
+                <a:latin typeface="NewComputerModern08" pitchFamily="2" charset="77"/>
+                <a:cs typeface="Times New Roman" panose="02020603050405020304" pitchFamily="18" charset="0"/>
+              </a:rPr>
+              <a:t> to </a:t>
+            </a:r>
+            <a:r>
+              <a:rPr lang="en-US" sz="600" dirty="0" err="1">
+                <a:latin typeface="NewComputerModern08" pitchFamily="2" charset="77"/>
+                <a:cs typeface="Times New Roman" panose="02020603050405020304" pitchFamily="18" charset="0"/>
+              </a:rPr>
+              <a:t>Sepolia</a:t>
+            </a:r>
+            <a:r>
+              <a:rPr lang="en-US" sz="600" dirty="0">
+                <a:latin typeface="NewComputerModern08" pitchFamily="2" charset="77"/>
+                <a:cs typeface="Times New Roman" panose="02020603050405020304" pitchFamily="18" charset="0"/>
+              </a:rPr>
+              <a:t>/</a:t>
+            </a:r>
+            <a:r>
+              <a:rPr lang="en-US" sz="600" dirty="0" err="1">
+                <a:latin typeface="NewComputerModern08" pitchFamily="2" charset="77"/>
+                <a:cs typeface="Times New Roman" panose="02020603050405020304" pitchFamily="18" charset="0"/>
+              </a:rPr>
+              <a:t>mainnet</a:t>
+            </a:r>
+            <a:r>
+              <a:rPr lang="en-US" sz="600" dirty="0">
+                <a:latin typeface="NewComputerModern08" pitchFamily="2" charset="77"/>
+                <a:cs typeface="Times New Roman" panose="02020603050405020304" pitchFamily="18" charset="0"/>
+              </a:rPr>
+              <a:t> by calling </a:t>
+            </a:r>
+            <a:r>
+              <a:rPr lang="en-US" sz="600" dirty="0" err="1">
+                <a:latin typeface="NewComputerModern08" pitchFamily="2" charset="77"/>
+                <a:cs typeface="Times New Roman" panose="02020603050405020304" pitchFamily="18" charset="0"/>
+              </a:rPr>
+              <a:t>verifyMain</a:t>
+            </a:r>
+            <a:r>
+              <a:rPr lang="en-US" sz="600" dirty="0">
+                <a:latin typeface="NewComputerModern08" pitchFamily="2" charset="77"/>
+                <a:cs typeface="Times New Roman" panose="02020603050405020304" pitchFamily="18" charset="0"/>
+              </a:rPr>
+              <a:t>(), </a:t>
+            </a:r>
+            <a:r>
+              <a:rPr lang="en-US" sz="600" dirty="0" err="1">
+                <a:latin typeface="NewComputerModern08" pitchFamily="2" charset="77"/>
+                <a:cs typeface="Times New Roman" panose="02020603050405020304" pitchFamily="18" charset="0"/>
+              </a:rPr>
+              <a:t>verifyReceipt</a:t>
+            </a:r>
+            <a:r>
+              <a:rPr lang="en-US" sz="600" dirty="0">
+                <a:latin typeface="NewComputerModern08" pitchFamily="2" charset="77"/>
+                <a:cs typeface="Times New Roman" panose="02020603050405020304" pitchFamily="18" charset="0"/>
+              </a:rPr>
+              <a:t>(), </a:t>
+            </a:r>
+            <a:r>
+              <a:rPr lang="en-US" sz="600" dirty="0" err="1">
+                <a:latin typeface="NewComputerModern08" pitchFamily="2" charset="77"/>
+                <a:cs typeface="Times New Roman" panose="02020603050405020304" pitchFamily="18" charset="0"/>
+              </a:rPr>
+              <a:t>verifyDispute</a:t>
+            </a:r>
+            <a:r>
+              <a:rPr lang="en-US" sz="600" dirty="0">
+                <a:latin typeface="NewComputerModern08" pitchFamily="2" charset="77"/>
+                <a:cs typeface="Times New Roman" panose="02020603050405020304" pitchFamily="18" charset="0"/>
+              </a:rPr>
+              <a:t>() functions</a:t>
+            </a:r>
+          </a:p>
+          <a:p>
+            <a:pPr marL="228600" indent="-228600">
+              <a:spcAft>
+                <a:spcPts val="400"/>
+              </a:spcAft>
+              <a:buFont typeface="+mj-lt"/>
+              <a:buAutoNum type="arabicPeriod"/>
+            </a:pPr>
+            <a:r>
+              <a:rPr lang="en-US" sz="600" dirty="0">
+                <a:latin typeface="NewComputerModern08" pitchFamily="2" charset="77"/>
+                <a:cs typeface="Times New Roman" panose="02020603050405020304" pitchFamily="18" charset="0"/>
+              </a:rPr>
+              <a:t>Decode byes payload</a:t>
+            </a:r>
+          </a:p>
+          <a:p>
+            <a:pPr marL="228600" indent="-228600">
+              <a:spcAft>
+                <a:spcPts val="400"/>
+              </a:spcAft>
+              <a:buFont typeface="+mj-lt"/>
+              <a:buAutoNum type="arabicPeriod"/>
+            </a:pPr>
+            <a:r>
+              <a:rPr lang="en-US" sz="600" dirty="0">
+                <a:latin typeface="NewComputerModern08" pitchFamily="2" charset="77"/>
+                <a:cs typeface="Times New Roman" panose="02020603050405020304" pitchFamily="18" charset="0"/>
+              </a:rPr>
+              <a:t>Re-derive Fiat-Shamir challenges</a:t>
+            </a:r>
+          </a:p>
+          <a:p>
+            <a:pPr marL="228600" indent="-228600">
+              <a:spcAft>
+                <a:spcPts val="400"/>
+              </a:spcAft>
+              <a:buFont typeface="+mj-lt"/>
+              <a:buAutoNum type="arabicPeriod"/>
+            </a:pPr>
+            <a:r>
+              <a:rPr lang="en-US" sz="600" dirty="0">
+                <a:latin typeface="NewComputerModern08" pitchFamily="2" charset="77"/>
+                <a:cs typeface="Times New Roman" panose="02020603050405020304" pitchFamily="18" charset="0"/>
+              </a:rPr>
+              <a:t>Verify KZG opening and challenges</a:t>
+            </a:r>
+          </a:p>
+        </p:txBody>
+      </p:sp>
+      <p:cxnSp>
+        <p:nvCxnSpPr>
+          <p:cNvPr id="187" name="Straight Arrow Connector 186">
+            <a:extLst>
+              <a:ext uri="{FF2B5EF4-FFF2-40B4-BE49-F238E27FC236}">
+                <a16:creationId xmlns:a16="http://schemas.microsoft.com/office/drawing/2014/main" id="{EC8EF1CF-8D7B-898D-F5C5-B1AEA0A1062E}"/>
+              </a:ext>
+            </a:extLst>
+          </p:cNvPr>
+          <p:cNvCxnSpPr>
+            <a:cxnSpLocks/>
+          </p:cNvCxnSpPr>
+          <p:nvPr/>
+        </p:nvCxnSpPr>
+        <p:spPr>
+          <a:xfrm>
+            <a:off x="4495316" y="4286424"/>
+            <a:ext cx="0" cy="631760"/>
+          </a:xfrm>
+          <a:prstGeom prst="straightConnector1">
+            <a:avLst/>
+          </a:prstGeom>
+          <a:ln w="9525">
+            <a:solidFill>
+              <a:schemeClr val="tx1">
+                <a:lumMod val="65000"/>
+                <a:lumOff val="35000"/>
+              </a:schemeClr>
+            </a:solidFill>
+            <a:tailEnd type="triangle" w="sm" len="med"/>
+          </a:ln>
+        </p:spPr>
+        <p:style>
+          <a:lnRef idx="2">
+            <a:schemeClr val="accent1"/>
+          </a:lnRef>
+          <a:fillRef idx="0">
+            <a:schemeClr val="accent1"/>
+          </a:fillRef>
+          <a:effectRef idx="1">
+            <a:schemeClr val="accent1"/>
+          </a:effectRef>
+          <a:fontRef idx="minor">
+            <a:schemeClr val="tx1"/>
+          </a:fontRef>
+        </p:style>
+      </p:cxnSp>
+      <p:sp>
+        <p:nvSpPr>
+          <p:cNvPr id="189" name="Rounded Rectangle 188">
+            <a:extLst>
+              <a:ext uri="{FF2B5EF4-FFF2-40B4-BE49-F238E27FC236}">
+                <a16:creationId xmlns:a16="http://schemas.microsoft.com/office/drawing/2014/main" id="{29F3D847-1DA2-8F0E-B499-A632801D7936}"/>
+              </a:ext>
+            </a:extLst>
+          </p:cNvPr>
+          <p:cNvSpPr/>
+          <p:nvPr/>
+        </p:nvSpPr>
+        <p:spPr>
+          <a:xfrm>
+            <a:off x="3122952" y="6159568"/>
+            <a:ext cx="1082896" cy="145267"/>
+          </a:xfrm>
+          <a:prstGeom prst="roundRect">
+            <a:avLst>
+              <a:gd name="adj" fmla="val 0"/>
+            </a:avLst>
+          </a:prstGeom>
+          <a:solidFill>
+            <a:srgbClr val="91AEFF">
+              <a:alpha val="32941"/>
+            </a:srgbClr>
+          </a:solidFill>
+          <a:ln w="6350">
+            <a:solidFill>
+              <a:schemeClr val="tx1">
+                <a:lumMod val="50000"/>
+                <a:lumOff val="50000"/>
+              </a:schemeClr>
+            </a:solidFill>
+            <a:prstDash val="solid"/>
+          </a:ln>
+        </p:spPr>
+        <p:style>
+          <a:lnRef idx="2">
+            <a:schemeClr val="accent1">
+              <a:shade val="15000"/>
+            </a:schemeClr>
+          </a:lnRef>
+          <a:fillRef idx="1">
+            <a:schemeClr val="accent1"/>
+          </a:fillRef>
+          <a:effectRef idx="0">
+            <a:schemeClr val="accent1"/>
+          </a:effectRef>
+          <a:fontRef idx="minor">
+            <a:schemeClr val="lt1"/>
+          </a:fontRef>
+        </p:style>
+        <p:txBody>
+          <a:bodyPr rtlCol="0" anchor="ctr"/>
+          <a:lstStyle/>
+          <a:p>
+            <a:pPr algn="ctr"/>
+            <a:r>
+              <a:rPr lang="en-US" sz="600" b="1" dirty="0">
+                <a:solidFill>
+                  <a:schemeClr val="tx1"/>
+                </a:solidFill>
+                <a:latin typeface="NewComputerModern08" pitchFamily="2" charset="77"/>
+                <a:cs typeface="Times New Roman" panose="02020603050405020304" pitchFamily="18" charset="0"/>
+              </a:rPr>
+              <a:t>Output</a:t>
+            </a:r>
+            <a:endParaRPr lang="en-US" sz="1400" b="1" dirty="0">
+              <a:solidFill>
+                <a:schemeClr val="tx1"/>
+              </a:solidFill>
+            </a:endParaRPr>
+          </a:p>
+        </p:txBody>
+      </p:sp>
+      <p:sp>
+        <p:nvSpPr>
+          <p:cNvPr id="190" name="Rounded Rectangle 189">
+            <a:extLst>
+              <a:ext uri="{FF2B5EF4-FFF2-40B4-BE49-F238E27FC236}">
+                <a16:creationId xmlns:a16="http://schemas.microsoft.com/office/drawing/2014/main" id="{BC3A6B96-C428-6673-A1F4-7597E15CCBA8}"/>
+              </a:ext>
+            </a:extLst>
+          </p:cNvPr>
+          <p:cNvSpPr/>
+          <p:nvPr/>
+        </p:nvSpPr>
+        <p:spPr>
+          <a:xfrm>
+            <a:off x="3122951" y="6304836"/>
+            <a:ext cx="1082896" cy="221484"/>
+          </a:xfrm>
+          <a:prstGeom prst="roundRect">
+            <a:avLst>
+              <a:gd name="adj" fmla="val 0"/>
+            </a:avLst>
+          </a:prstGeom>
+          <a:noFill/>
+          <a:ln w="6350">
+            <a:solidFill>
+              <a:schemeClr val="tx1">
+                <a:lumMod val="50000"/>
+                <a:lumOff val="50000"/>
+              </a:schemeClr>
+            </a:solidFill>
+            <a:prstDash val="solid"/>
+          </a:ln>
+        </p:spPr>
+        <p:style>
+          <a:lnRef idx="2">
+            <a:schemeClr val="accent1">
+              <a:shade val="15000"/>
+            </a:schemeClr>
+          </a:lnRef>
+          <a:fillRef idx="1">
+            <a:schemeClr val="accent1"/>
+          </a:fillRef>
+          <a:effectRef idx="0">
+            <a:schemeClr val="accent1"/>
+          </a:effectRef>
+          <a:fontRef idx="minor">
+            <a:schemeClr val="lt1"/>
+          </a:fontRef>
+        </p:style>
+        <p:txBody>
+          <a:bodyPr rtlCol="0" anchor="ctr"/>
+          <a:lstStyle/>
+          <a:p>
+            <a:pPr algn="ctr"/>
+            <a:r>
+              <a:rPr lang="en-US" sz="600" dirty="0">
+                <a:solidFill>
+                  <a:schemeClr val="tx1"/>
+                </a:solidFill>
+                <a:latin typeface="NewComputerModern08" pitchFamily="2" charset="77"/>
+                <a:cs typeface="Times New Roman" panose="02020603050405020304" pitchFamily="18" charset="0"/>
+              </a:rPr>
+              <a:t>Proof valid/invalid</a:t>
+            </a:r>
+          </a:p>
+        </p:txBody>
+      </p:sp>
+      <p:cxnSp>
+        <p:nvCxnSpPr>
+          <p:cNvPr id="191" name="Straight Arrow Connector 190">
+            <a:extLst>
+              <a:ext uri="{FF2B5EF4-FFF2-40B4-BE49-F238E27FC236}">
+                <a16:creationId xmlns:a16="http://schemas.microsoft.com/office/drawing/2014/main" id="{99BD3D66-3194-F0EA-B324-ADD6E804E210}"/>
+              </a:ext>
+            </a:extLst>
+          </p:cNvPr>
+          <p:cNvCxnSpPr>
+            <a:cxnSpLocks/>
+            <a:stCxn id="186" idx="2"/>
+            <a:endCxn id="189" idx="0"/>
+          </p:cNvCxnSpPr>
+          <p:nvPr/>
+        </p:nvCxnSpPr>
+        <p:spPr>
+          <a:xfrm flipH="1">
+            <a:off x="3664400" y="5718403"/>
+            <a:ext cx="3511" cy="441165"/>
+          </a:xfrm>
+          <a:prstGeom prst="straightConnector1">
+            <a:avLst/>
+          </a:prstGeom>
+          <a:ln w="9525">
+            <a:solidFill>
+              <a:schemeClr val="tx1">
+                <a:lumMod val="65000"/>
+                <a:lumOff val="35000"/>
+              </a:schemeClr>
+            </a:solidFill>
+            <a:tailEnd type="triangle" w="sm" len="med"/>
+          </a:ln>
+        </p:spPr>
+        <p:style>
+          <a:lnRef idx="2">
+            <a:schemeClr val="accent1"/>
+          </a:lnRef>
+          <a:fillRef idx="0">
+            <a:schemeClr val="accent1"/>
+          </a:fillRef>
+          <a:effectRef idx="1">
+            <a:schemeClr val="accent1"/>
+          </a:effectRef>
+          <a:fontRef idx="minor">
+            <a:schemeClr val="tx1"/>
+          </a:fontRef>
+        </p:style>
+      </p:cxnSp>
+      <p:sp>
+        <p:nvSpPr>
+          <p:cNvPr id="199" name="Rounded Rectangle 198">
+            <a:extLst>
+              <a:ext uri="{FF2B5EF4-FFF2-40B4-BE49-F238E27FC236}">
+                <a16:creationId xmlns:a16="http://schemas.microsoft.com/office/drawing/2014/main" id="{07D63AD1-19DA-64E0-E743-ADBECEBE32E8}"/>
+              </a:ext>
+            </a:extLst>
+          </p:cNvPr>
+          <p:cNvSpPr/>
+          <p:nvPr/>
+        </p:nvSpPr>
+        <p:spPr>
+          <a:xfrm>
+            <a:off x="102808" y="3807358"/>
+            <a:ext cx="1071615" cy="1177918"/>
+          </a:xfrm>
+          <a:prstGeom prst="roundRect">
+            <a:avLst>
+              <a:gd name="adj" fmla="val 3202"/>
+            </a:avLst>
+          </a:prstGeom>
+          <a:solidFill>
+            <a:srgbClr val="FBFF00">
+              <a:alpha val="12157"/>
+            </a:srgbClr>
+          </a:solidFill>
+          <a:ln w="6350">
+            <a:solidFill>
+              <a:schemeClr val="bg1">
+                <a:lumMod val="50000"/>
+              </a:schemeClr>
+            </a:solidFill>
+            <a:prstDash val="dash"/>
+          </a:ln>
+        </p:spPr>
+        <p:style>
+          <a:lnRef idx="2">
+            <a:schemeClr val="accent1">
+              <a:shade val="15000"/>
+            </a:schemeClr>
+          </a:lnRef>
+          <a:fillRef idx="1">
+            <a:schemeClr val="accent1"/>
+          </a:fillRef>
+          <a:effectRef idx="0">
+            <a:schemeClr val="accent1"/>
+          </a:effectRef>
+          <a:fontRef idx="minor">
+            <a:schemeClr val="lt1"/>
+          </a:fontRef>
+        </p:style>
+        <p:txBody>
+          <a:bodyPr rtlCol="0" anchor="ctr"/>
+          <a:lstStyle/>
+          <a:p>
+            <a:pPr algn="ctr"/>
+            <a:endParaRPr lang="en-US" sz="600" dirty="0">
+              <a:solidFill>
+                <a:schemeClr val="tx1"/>
+              </a:solidFill>
+              <a:latin typeface="NewComputerModern08" pitchFamily="2" charset="77"/>
+            </a:endParaRPr>
+          </a:p>
+        </p:txBody>
+      </p:sp>
+      <p:sp>
+        <p:nvSpPr>
+          <p:cNvPr id="200" name="TextBox 199">
+            <a:extLst>
+              <a:ext uri="{FF2B5EF4-FFF2-40B4-BE49-F238E27FC236}">
+                <a16:creationId xmlns:a16="http://schemas.microsoft.com/office/drawing/2014/main" id="{9F4A5E55-6936-A41E-A8A7-02FF572C4E5D}"/>
+              </a:ext>
+            </a:extLst>
+          </p:cNvPr>
+          <p:cNvSpPr txBox="1"/>
+          <p:nvPr/>
+        </p:nvSpPr>
+        <p:spPr>
+          <a:xfrm>
+            <a:off x="268379" y="3710398"/>
+            <a:ext cx="734435" cy="184666"/>
+          </a:xfrm>
+          <a:prstGeom prst="rect">
+            <a:avLst/>
+          </a:prstGeom>
+          <a:solidFill>
+            <a:schemeClr val="bg1"/>
+          </a:solidFill>
+          <a:ln w="6350">
+            <a:solidFill>
+              <a:schemeClr val="tx1"/>
+            </a:solidFill>
+          </a:ln>
+        </p:spPr>
+        <p:txBody>
+          <a:bodyPr wrap="square" rtlCol="0">
+            <a:spAutoFit/>
+          </a:bodyPr>
+          <a:lstStyle/>
+          <a:p>
+            <a:pPr algn="ctr"/>
+            <a:r>
+              <a:rPr lang="en-US" sz="600" b="1" dirty="0">
+                <a:latin typeface="NewComputerModern08" pitchFamily="2" charset="77"/>
+                <a:cs typeface="Times New Roman" panose="02020603050405020304" pitchFamily="18" charset="0"/>
+              </a:rPr>
+              <a:t>Receipt check</a:t>
+            </a:r>
+            <a:endParaRPr lang="en-US" sz="1050" b="1" dirty="0">
+              <a:latin typeface="NewComputerModern08" pitchFamily="2" charset="77"/>
+              <a:cs typeface="Times New Roman" panose="02020603050405020304" pitchFamily="18" charset="0"/>
+            </a:endParaRPr>
+          </a:p>
+        </p:txBody>
+      </p:sp>
+      <p:sp>
+        <p:nvSpPr>
+          <p:cNvPr id="201" name="Rounded Rectangle 200">
+            <a:extLst>
+              <a:ext uri="{FF2B5EF4-FFF2-40B4-BE49-F238E27FC236}">
+                <a16:creationId xmlns:a16="http://schemas.microsoft.com/office/drawing/2014/main" id="{342A3049-53D8-F811-D5FC-F6D47867DB9A}"/>
+              </a:ext>
+            </a:extLst>
+          </p:cNvPr>
+          <p:cNvSpPr/>
+          <p:nvPr/>
+        </p:nvSpPr>
+        <p:spPr>
+          <a:xfrm>
+            <a:off x="102808" y="5729380"/>
+            <a:ext cx="2210675" cy="468424"/>
+          </a:xfrm>
+          <a:prstGeom prst="roundRect">
+            <a:avLst>
+              <a:gd name="adj" fmla="val 3202"/>
+            </a:avLst>
+          </a:prstGeom>
+          <a:solidFill>
+            <a:srgbClr val="FBFF00">
+              <a:alpha val="12157"/>
+            </a:srgbClr>
+          </a:solidFill>
+          <a:ln w="6350">
+            <a:solidFill>
+              <a:schemeClr val="bg1">
+                <a:lumMod val="50000"/>
+              </a:schemeClr>
+            </a:solidFill>
+            <a:prstDash val="dash"/>
+          </a:ln>
+        </p:spPr>
+        <p:style>
+          <a:lnRef idx="2">
+            <a:schemeClr val="accent1">
+              <a:shade val="15000"/>
+            </a:schemeClr>
+          </a:lnRef>
+          <a:fillRef idx="1">
+            <a:schemeClr val="accent1"/>
+          </a:fillRef>
+          <a:effectRef idx="0">
+            <a:schemeClr val="accent1"/>
+          </a:effectRef>
+          <a:fontRef idx="minor">
+            <a:schemeClr val="lt1"/>
+          </a:fontRef>
+        </p:style>
+        <p:txBody>
+          <a:bodyPr rtlCol="0" anchor="ctr"/>
+          <a:lstStyle/>
+          <a:p>
+            <a:pPr algn="ctr"/>
+            <a:endParaRPr lang="en-US" sz="600" dirty="0">
+              <a:solidFill>
+                <a:schemeClr val="tx1"/>
+              </a:solidFill>
+              <a:latin typeface="NewComputerModern08" pitchFamily="2" charset="77"/>
+            </a:endParaRPr>
+          </a:p>
+        </p:txBody>
+      </p:sp>
+      <p:sp>
+        <p:nvSpPr>
+          <p:cNvPr id="202" name="TextBox 201">
+            <a:extLst>
+              <a:ext uri="{FF2B5EF4-FFF2-40B4-BE49-F238E27FC236}">
+                <a16:creationId xmlns:a16="http://schemas.microsoft.com/office/drawing/2014/main" id="{D2617BC4-6D35-925A-AE93-A4A64C5DF04C}"/>
+              </a:ext>
+            </a:extLst>
+          </p:cNvPr>
+          <p:cNvSpPr txBox="1"/>
+          <p:nvPr/>
+        </p:nvSpPr>
+        <p:spPr>
+          <a:xfrm>
+            <a:off x="588727" y="5638511"/>
+            <a:ext cx="1306054" cy="184666"/>
+          </a:xfrm>
+          <a:prstGeom prst="rect">
+            <a:avLst/>
+          </a:prstGeom>
+          <a:solidFill>
+            <a:schemeClr val="bg1"/>
+          </a:solidFill>
+          <a:ln w="6350">
+            <a:solidFill>
+              <a:schemeClr val="tx1"/>
+            </a:solidFill>
+          </a:ln>
+        </p:spPr>
+        <p:txBody>
+          <a:bodyPr wrap="square" rtlCol="0">
+            <a:spAutoFit/>
+          </a:bodyPr>
+          <a:lstStyle/>
+          <a:p>
+            <a:pPr algn="ctr"/>
+            <a:r>
+              <a:rPr lang="en-US" sz="600" b="1" dirty="0">
+                <a:latin typeface="NewComputerModern08" pitchFamily="2" charset="77"/>
+                <a:cs typeface="Times New Roman" panose="02020603050405020304" pitchFamily="18" charset="0"/>
+              </a:rPr>
+              <a:t>Dispute Resolution</a:t>
+            </a:r>
+            <a:endParaRPr lang="en-US" sz="1050" b="1" dirty="0">
+              <a:latin typeface="NewComputerModern08" pitchFamily="2" charset="77"/>
+              <a:cs typeface="Times New Roman" panose="02020603050405020304" pitchFamily="18" charset="0"/>
+            </a:endParaRPr>
+          </a:p>
+        </p:txBody>
+      </p:sp>
+      <p:sp>
+        <p:nvSpPr>
+          <p:cNvPr id="204" name="Rounded Rectangle 203">
+            <a:extLst>
+              <a:ext uri="{FF2B5EF4-FFF2-40B4-BE49-F238E27FC236}">
+                <a16:creationId xmlns:a16="http://schemas.microsoft.com/office/drawing/2014/main" id="{686754D7-92BA-1B81-67AE-EC0B7ED8F19C}"/>
+              </a:ext>
+            </a:extLst>
+          </p:cNvPr>
+          <p:cNvSpPr/>
+          <p:nvPr/>
+        </p:nvSpPr>
+        <p:spPr>
+          <a:xfrm>
+            <a:off x="660684" y="6432617"/>
+            <a:ext cx="1082896" cy="145267"/>
+          </a:xfrm>
+          <a:prstGeom prst="roundRect">
+            <a:avLst>
+              <a:gd name="adj" fmla="val 0"/>
+            </a:avLst>
+          </a:prstGeom>
+          <a:solidFill>
+            <a:srgbClr val="91AEFF">
+              <a:alpha val="32941"/>
+            </a:srgbClr>
+          </a:solidFill>
+          <a:ln w="6350">
+            <a:solidFill>
+              <a:schemeClr val="tx1">
+                <a:lumMod val="50000"/>
+                <a:lumOff val="50000"/>
+              </a:schemeClr>
+            </a:solidFill>
+            <a:prstDash val="solid"/>
+          </a:ln>
+        </p:spPr>
+        <p:style>
+          <a:lnRef idx="2">
+            <a:schemeClr val="accent1">
+              <a:shade val="15000"/>
+            </a:schemeClr>
+          </a:lnRef>
+          <a:fillRef idx="1">
+            <a:schemeClr val="accent1"/>
+          </a:fillRef>
+          <a:effectRef idx="0">
+            <a:schemeClr val="accent1"/>
+          </a:effectRef>
+          <a:fontRef idx="minor">
+            <a:schemeClr val="lt1"/>
+          </a:fontRef>
+        </p:style>
+        <p:txBody>
+          <a:bodyPr rtlCol="0" anchor="ctr"/>
+          <a:lstStyle/>
+          <a:p>
+            <a:pPr algn="ctr"/>
+            <a:r>
+              <a:rPr lang="en-US" sz="600" b="1" dirty="0">
+                <a:solidFill>
+                  <a:schemeClr val="tx1"/>
+                </a:solidFill>
+                <a:latin typeface="NewComputerModern08" pitchFamily="2" charset="77"/>
+                <a:cs typeface="Times New Roman" panose="02020603050405020304" pitchFamily="18" charset="0"/>
+              </a:rPr>
+              <a:t>Output</a:t>
+            </a:r>
+            <a:endParaRPr lang="en-US" sz="1400" b="1" dirty="0">
+              <a:solidFill>
+                <a:schemeClr val="tx1"/>
+              </a:solidFill>
+            </a:endParaRPr>
+          </a:p>
+        </p:txBody>
+      </p:sp>
+      <p:sp>
+        <p:nvSpPr>
+          <p:cNvPr id="205" name="Rounded Rectangle 204">
+            <a:extLst>
+              <a:ext uri="{FF2B5EF4-FFF2-40B4-BE49-F238E27FC236}">
+                <a16:creationId xmlns:a16="http://schemas.microsoft.com/office/drawing/2014/main" id="{1DF75ED8-2FC1-6B42-5A3D-E8E49830821F}"/>
+              </a:ext>
+            </a:extLst>
+          </p:cNvPr>
+          <p:cNvSpPr/>
+          <p:nvPr/>
+        </p:nvSpPr>
+        <p:spPr>
+          <a:xfrm>
+            <a:off x="660683" y="6577885"/>
+            <a:ext cx="1082896" cy="221484"/>
+          </a:xfrm>
+          <a:prstGeom prst="roundRect">
+            <a:avLst>
+              <a:gd name="adj" fmla="val 0"/>
+            </a:avLst>
+          </a:prstGeom>
+          <a:noFill/>
+          <a:ln w="6350">
+            <a:solidFill>
+              <a:schemeClr val="tx1">
+                <a:lumMod val="50000"/>
+                <a:lumOff val="50000"/>
+              </a:schemeClr>
+            </a:solidFill>
+            <a:prstDash val="solid"/>
+          </a:ln>
+        </p:spPr>
+        <p:style>
+          <a:lnRef idx="2">
+            <a:schemeClr val="accent1">
+              <a:shade val="15000"/>
+            </a:schemeClr>
+          </a:lnRef>
+          <a:fillRef idx="1">
+            <a:schemeClr val="accent1"/>
+          </a:fillRef>
+          <a:effectRef idx="0">
+            <a:schemeClr val="accent1"/>
+          </a:effectRef>
+          <a:fontRef idx="minor">
+            <a:schemeClr val="lt1"/>
+          </a:fontRef>
+        </p:style>
+        <p:txBody>
+          <a:bodyPr rtlCol="0" anchor="ctr"/>
+          <a:lstStyle/>
+          <a:p>
+            <a:pPr algn="ctr"/>
+            <a:r>
+              <a:rPr lang="en-US" sz="600" dirty="0">
+                <a:solidFill>
+                  <a:schemeClr val="tx1"/>
+                </a:solidFill>
+                <a:latin typeface="NewComputerModern08" pitchFamily="2" charset="77"/>
+                <a:cs typeface="Times New Roman" panose="02020603050405020304" pitchFamily="18" charset="0"/>
+              </a:rPr>
+              <a:t>Dispute valid/invalid</a:t>
+            </a:r>
+          </a:p>
+        </p:txBody>
+      </p:sp>
+      <p:sp>
+        <p:nvSpPr>
+          <p:cNvPr id="208" name="TextBox 207">
+            <a:extLst>
+              <a:ext uri="{FF2B5EF4-FFF2-40B4-BE49-F238E27FC236}">
+                <a16:creationId xmlns:a16="http://schemas.microsoft.com/office/drawing/2014/main" id="{A1975FC8-0D85-9805-5F1F-4DD99561EC17}"/>
+              </a:ext>
+            </a:extLst>
+          </p:cNvPr>
+          <p:cNvSpPr txBox="1"/>
+          <p:nvPr/>
+        </p:nvSpPr>
+        <p:spPr>
+          <a:xfrm>
+            <a:off x="153573" y="3963105"/>
+            <a:ext cx="975903" cy="954107"/>
+          </a:xfrm>
+          <a:prstGeom prst="rect">
+            <a:avLst/>
+          </a:prstGeom>
+          <a:solidFill>
+            <a:schemeClr val="bg1"/>
+          </a:solidFill>
+          <a:ln w="3175">
+            <a:solidFill>
+              <a:schemeClr val="tx1"/>
+            </a:solidFill>
+          </a:ln>
+        </p:spPr>
+        <p:txBody>
+          <a:bodyPr wrap="square" rtlCol="0">
+            <a:spAutoFit/>
+          </a:bodyPr>
+          <a:lstStyle/>
+          <a:p>
+            <a:r>
+              <a:rPr lang="en-US" sz="600" dirty="0">
+                <a:latin typeface="NewComputerModern08" pitchFamily="2" charset="77"/>
+                <a:cs typeface="Times New Roman" panose="02020603050405020304" pitchFamily="18" charset="0"/>
+              </a:rPr>
+              <a:t>1. Voter provides ballot ID</a:t>
+            </a:r>
+          </a:p>
+          <a:p>
+            <a:endParaRPr lang="en-US" sz="400" dirty="0">
+              <a:latin typeface="NewComputerModern08" pitchFamily="2" charset="77"/>
+              <a:cs typeface="Times New Roman" panose="02020603050405020304" pitchFamily="18" charset="0"/>
+            </a:endParaRPr>
+          </a:p>
+          <a:p>
+            <a:r>
+              <a:rPr lang="en-US" sz="600" dirty="0">
+                <a:latin typeface="NewComputerModern08" pitchFamily="2" charset="77"/>
+                <a:cs typeface="Times New Roman" panose="02020603050405020304" pitchFamily="18" charset="0"/>
+              </a:rPr>
+              <a:t>2. EA performs KZG opening of Ballot id in permutated tables</a:t>
+            </a:r>
+          </a:p>
+          <a:p>
+            <a:endParaRPr lang="en-US" sz="400" dirty="0">
+              <a:latin typeface="NewComputerModern08" pitchFamily="2" charset="77"/>
+              <a:cs typeface="Times New Roman" panose="02020603050405020304" pitchFamily="18" charset="0"/>
+            </a:endParaRPr>
+          </a:p>
+          <a:p>
+            <a:r>
+              <a:rPr lang="en-US" sz="600" dirty="0">
+                <a:latin typeface="NewComputerModern08" pitchFamily="2" charset="77"/>
+                <a:cs typeface="Times New Roman" panose="02020603050405020304" pitchFamily="18" charset="0"/>
+              </a:rPr>
+              <a:t>3. Voter checks code has mark value = 1 in expected row</a:t>
+            </a:r>
+          </a:p>
+        </p:txBody>
+      </p:sp>
+      <p:sp>
+        <p:nvSpPr>
+          <p:cNvPr id="209" name="Rounded Rectangle 208">
+            <a:extLst>
+              <a:ext uri="{FF2B5EF4-FFF2-40B4-BE49-F238E27FC236}">
+                <a16:creationId xmlns:a16="http://schemas.microsoft.com/office/drawing/2014/main" id="{699526BC-2D4D-F13F-21F7-ECD177793C82}"/>
+              </a:ext>
+            </a:extLst>
+          </p:cNvPr>
+          <p:cNvSpPr/>
+          <p:nvPr/>
+        </p:nvSpPr>
+        <p:spPr>
+          <a:xfrm>
+            <a:off x="163754" y="5123306"/>
+            <a:ext cx="944016" cy="145267"/>
+          </a:xfrm>
+          <a:prstGeom prst="roundRect">
+            <a:avLst>
+              <a:gd name="adj" fmla="val 0"/>
+            </a:avLst>
+          </a:prstGeom>
+          <a:solidFill>
+            <a:srgbClr val="91AEFF">
+              <a:alpha val="32941"/>
+            </a:srgbClr>
+          </a:solidFill>
+          <a:ln w="6350">
+            <a:solidFill>
+              <a:schemeClr val="tx1">
+                <a:lumMod val="50000"/>
+                <a:lumOff val="50000"/>
+              </a:schemeClr>
+            </a:solidFill>
+            <a:prstDash val="solid"/>
+          </a:ln>
+        </p:spPr>
+        <p:style>
+          <a:lnRef idx="2">
+            <a:schemeClr val="accent1">
+              <a:shade val="15000"/>
+            </a:schemeClr>
+          </a:lnRef>
+          <a:fillRef idx="1">
+            <a:schemeClr val="accent1"/>
+          </a:fillRef>
+          <a:effectRef idx="0">
+            <a:schemeClr val="accent1"/>
+          </a:effectRef>
+          <a:fontRef idx="minor">
+            <a:schemeClr val="lt1"/>
+          </a:fontRef>
+        </p:style>
+        <p:txBody>
+          <a:bodyPr rtlCol="0" anchor="ctr"/>
+          <a:lstStyle/>
+          <a:p>
+            <a:pPr algn="ctr"/>
+            <a:r>
+              <a:rPr lang="en-US" sz="600" b="1" dirty="0">
+                <a:solidFill>
+                  <a:schemeClr val="tx1"/>
+                </a:solidFill>
+                <a:latin typeface="NewComputerModern08" pitchFamily="2" charset="77"/>
+                <a:cs typeface="Times New Roman" panose="02020603050405020304" pitchFamily="18" charset="0"/>
+              </a:rPr>
+              <a:t>Output</a:t>
+            </a:r>
+            <a:endParaRPr lang="en-US" sz="1400" b="1" dirty="0">
+              <a:solidFill>
+                <a:schemeClr val="tx1"/>
+              </a:solidFill>
+            </a:endParaRPr>
+          </a:p>
+        </p:txBody>
+      </p:sp>
+      <p:sp>
+        <p:nvSpPr>
+          <p:cNvPr id="210" name="Rounded Rectangle 209">
+            <a:extLst>
+              <a:ext uri="{FF2B5EF4-FFF2-40B4-BE49-F238E27FC236}">
+                <a16:creationId xmlns:a16="http://schemas.microsoft.com/office/drawing/2014/main" id="{00062826-5F82-717C-58EA-B88B628B61AB}"/>
+              </a:ext>
+            </a:extLst>
+          </p:cNvPr>
+          <p:cNvSpPr/>
+          <p:nvPr/>
+        </p:nvSpPr>
+        <p:spPr>
+          <a:xfrm>
+            <a:off x="163753" y="5268574"/>
+            <a:ext cx="944016" cy="221484"/>
+          </a:xfrm>
+          <a:prstGeom prst="roundRect">
+            <a:avLst>
+              <a:gd name="adj" fmla="val 0"/>
+            </a:avLst>
+          </a:prstGeom>
+          <a:noFill/>
+          <a:ln w="6350">
+            <a:solidFill>
+              <a:schemeClr val="tx1">
+                <a:lumMod val="50000"/>
+                <a:lumOff val="50000"/>
+              </a:schemeClr>
+            </a:solidFill>
+            <a:prstDash val="solid"/>
+          </a:ln>
+        </p:spPr>
+        <p:style>
+          <a:lnRef idx="2">
+            <a:schemeClr val="accent1">
+              <a:shade val="15000"/>
+            </a:schemeClr>
+          </a:lnRef>
+          <a:fillRef idx="1">
+            <a:schemeClr val="accent1"/>
+          </a:fillRef>
+          <a:effectRef idx="0">
+            <a:schemeClr val="accent1"/>
+          </a:effectRef>
+          <a:fontRef idx="minor">
+            <a:schemeClr val="lt1"/>
+          </a:fontRef>
+        </p:style>
+        <p:txBody>
+          <a:bodyPr rtlCol="0" anchor="ctr"/>
+          <a:lstStyle/>
+          <a:p>
+            <a:pPr algn="ctr"/>
+            <a:r>
+              <a:rPr lang="en-US" sz="600" dirty="0">
+                <a:solidFill>
+                  <a:schemeClr val="tx1"/>
+                </a:solidFill>
+                <a:latin typeface="NewComputerModern08" pitchFamily="2" charset="77"/>
+                <a:cs typeface="Times New Roman" panose="02020603050405020304" pitchFamily="18" charset="0"/>
+              </a:rPr>
+              <a:t>Receipt valid/invalid</a:t>
+            </a:r>
+          </a:p>
+        </p:txBody>
+      </p:sp>
+      <p:cxnSp>
+        <p:nvCxnSpPr>
+          <p:cNvPr id="211" name="Straight Arrow Connector 210">
+            <a:extLst>
+              <a:ext uri="{FF2B5EF4-FFF2-40B4-BE49-F238E27FC236}">
+                <a16:creationId xmlns:a16="http://schemas.microsoft.com/office/drawing/2014/main" id="{CD1CE1EA-8713-61C7-7C4C-F9F77FCDCB3D}"/>
+              </a:ext>
+            </a:extLst>
+          </p:cNvPr>
+          <p:cNvCxnSpPr>
+            <a:cxnSpLocks/>
+            <a:stCxn id="208" idx="2"/>
+            <a:endCxn id="209" idx="0"/>
+          </p:cNvCxnSpPr>
+          <p:nvPr/>
+        </p:nvCxnSpPr>
+        <p:spPr>
+          <a:xfrm flipH="1">
+            <a:off x="635762" y="4917212"/>
+            <a:ext cx="5763" cy="206094"/>
+          </a:xfrm>
+          <a:prstGeom prst="straightConnector1">
+            <a:avLst/>
+          </a:prstGeom>
+          <a:ln w="9525">
+            <a:solidFill>
+              <a:schemeClr val="tx1">
+                <a:lumMod val="65000"/>
+                <a:lumOff val="35000"/>
+              </a:schemeClr>
+            </a:solidFill>
+            <a:tailEnd type="triangle" w="sm" len="med"/>
+          </a:ln>
+        </p:spPr>
+        <p:style>
+          <a:lnRef idx="2">
+            <a:schemeClr val="accent1"/>
+          </a:lnRef>
+          <a:fillRef idx="0">
+            <a:schemeClr val="accent1"/>
+          </a:fillRef>
+          <a:effectRef idx="1">
+            <a:schemeClr val="accent1"/>
+          </a:effectRef>
+          <a:fontRef idx="minor">
+            <a:schemeClr val="tx1"/>
+          </a:fontRef>
+        </p:style>
+      </p:cxnSp>
+      <p:sp>
+        <p:nvSpPr>
+          <p:cNvPr id="216" name="Rounded Rectangle 215">
+            <a:extLst>
+              <a:ext uri="{FF2B5EF4-FFF2-40B4-BE49-F238E27FC236}">
+                <a16:creationId xmlns:a16="http://schemas.microsoft.com/office/drawing/2014/main" id="{F09514FA-1E55-C0DC-7B4F-351CF58CF9E0}"/>
+              </a:ext>
+            </a:extLst>
+          </p:cNvPr>
+          <p:cNvSpPr/>
+          <p:nvPr/>
+        </p:nvSpPr>
+        <p:spPr>
+          <a:xfrm>
+            <a:off x="1241868" y="4433666"/>
+            <a:ext cx="1071615" cy="545390"/>
+          </a:xfrm>
+          <a:prstGeom prst="roundRect">
+            <a:avLst>
+              <a:gd name="adj" fmla="val 3202"/>
+            </a:avLst>
+          </a:prstGeom>
+          <a:solidFill>
+            <a:srgbClr val="FBFF00">
+              <a:alpha val="12157"/>
+            </a:srgbClr>
+          </a:solidFill>
+          <a:ln w="6350">
+            <a:solidFill>
+              <a:schemeClr val="bg1">
+                <a:lumMod val="50000"/>
+              </a:schemeClr>
+            </a:solidFill>
+            <a:prstDash val="dash"/>
+          </a:ln>
+        </p:spPr>
+        <p:style>
+          <a:lnRef idx="2">
+            <a:schemeClr val="accent1">
+              <a:shade val="15000"/>
+            </a:schemeClr>
+          </a:lnRef>
+          <a:fillRef idx="1">
+            <a:schemeClr val="accent1"/>
+          </a:fillRef>
+          <a:effectRef idx="0">
+            <a:schemeClr val="accent1"/>
+          </a:effectRef>
+          <a:fontRef idx="minor">
+            <a:schemeClr val="lt1"/>
+          </a:fontRef>
+        </p:style>
+        <p:txBody>
+          <a:bodyPr rtlCol="0" anchor="ctr"/>
+          <a:lstStyle/>
+          <a:p>
+            <a:pPr algn="ctr"/>
+            <a:endParaRPr lang="en-US" sz="600" dirty="0">
+              <a:solidFill>
+                <a:schemeClr val="tx1"/>
+              </a:solidFill>
+              <a:latin typeface="NewComputerModern08" pitchFamily="2" charset="77"/>
+            </a:endParaRPr>
+          </a:p>
+        </p:txBody>
+      </p:sp>
+      <p:sp>
+        <p:nvSpPr>
+          <p:cNvPr id="217" name="TextBox 216">
+            <a:extLst>
+              <a:ext uri="{FF2B5EF4-FFF2-40B4-BE49-F238E27FC236}">
+                <a16:creationId xmlns:a16="http://schemas.microsoft.com/office/drawing/2014/main" id="{83F225CB-93B3-AA7C-911B-1D664E1A8E11}"/>
+              </a:ext>
+            </a:extLst>
+          </p:cNvPr>
+          <p:cNvSpPr txBox="1"/>
+          <p:nvPr/>
+        </p:nvSpPr>
+        <p:spPr>
+          <a:xfrm>
+            <a:off x="1401133" y="4332954"/>
+            <a:ext cx="734435" cy="184666"/>
+          </a:xfrm>
+          <a:prstGeom prst="rect">
+            <a:avLst/>
+          </a:prstGeom>
+          <a:solidFill>
+            <a:schemeClr val="bg1"/>
+          </a:solidFill>
+          <a:ln w="6350">
+            <a:solidFill>
+              <a:schemeClr val="tx1"/>
+            </a:solidFill>
+          </a:ln>
+        </p:spPr>
+        <p:txBody>
+          <a:bodyPr wrap="square" rtlCol="0">
+            <a:spAutoFit/>
+          </a:bodyPr>
+          <a:lstStyle/>
+          <a:p>
+            <a:pPr algn="ctr"/>
+            <a:r>
+              <a:rPr lang="en-US" sz="600" b="1" dirty="0">
+                <a:latin typeface="NewComputerModern08" pitchFamily="2" charset="77"/>
+                <a:cs typeface="Times New Roman" panose="02020603050405020304" pitchFamily="18" charset="0"/>
+              </a:rPr>
+              <a:t>Print Audit</a:t>
+            </a:r>
+            <a:endParaRPr lang="en-US" sz="1050" b="1" dirty="0">
+              <a:latin typeface="NewComputerModern08" pitchFamily="2" charset="77"/>
+              <a:cs typeface="Times New Roman" panose="02020603050405020304" pitchFamily="18" charset="0"/>
+            </a:endParaRPr>
+          </a:p>
+        </p:txBody>
+      </p:sp>
+      <p:sp>
+        <p:nvSpPr>
+          <p:cNvPr id="218" name="TextBox 217">
+            <a:extLst>
+              <a:ext uri="{FF2B5EF4-FFF2-40B4-BE49-F238E27FC236}">
+                <a16:creationId xmlns:a16="http://schemas.microsoft.com/office/drawing/2014/main" id="{AB5F4E56-BAF5-B25E-958C-CEFC2568B160}"/>
+              </a:ext>
+            </a:extLst>
+          </p:cNvPr>
+          <p:cNvSpPr txBox="1"/>
+          <p:nvPr/>
+        </p:nvSpPr>
+        <p:spPr>
+          <a:xfrm>
+            <a:off x="1292633" y="4610541"/>
+            <a:ext cx="975903" cy="276999"/>
+          </a:xfrm>
+          <a:prstGeom prst="rect">
+            <a:avLst/>
+          </a:prstGeom>
+          <a:solidFill>
+            <a:schemeClr val="bg1"/>
+          </a:solidFill>
+          <a:ln w="3175">
+            <a:solidFill>
+              <a:schemeClr val="tx1"/>
+            </a:solidFill>
+          </a:ln>
+        </p:spPr>
+        <p:txBody>
+          <a:bodyPr wrap="square" rtlCol="0">
+            <a:spAutoFit/>
+          </a:bodyPr>
+          <a:lstStyle/>
+          <a:p>
+            <a:r>
+              <a:rPr lang="en-US" sz="600" dirty="0">
+                <a:latin typeface="NewComputerModern08" pitchFamily="2" charset="77"/>
+                <a:cs typeface="Times New Roman" panose="02020603050405020304" pitchFamily="18" charset="0"/>
+              </a:rPr>
+              <a:t>Check KZG openings match paper ballots</a:t>
+            </a:r>
+          </a:p>
+        </p:txBody>
+      </p:sp>
+      <p:sp>
+        <p:nvSpPr>
+          <p:cNvPr id="219" name="Rounded Rectangle 218">
+            <a:extLst>
+              <a:ext uri="{FF2B5EF4-FFF2-40B4-BE49-F238E27FC236}">
+                <a16:creationId xmlns:a16="http://schemas.microsoft.com/office/drawing/2014/main" id="{5F678E85-E6B9-FB97-9BF3-E00AB501883D}"/>
+              </a:ext>
+            </a:extLst>
+          </p:cNvPr>
+          <p:cNvSpPr/>
+          <p:nvPr/>
+        </p:nvSpPr>
+        <p:spPr>
+          <a:xfrm>
+            <a:off x="1308010" y="5118617"/>
+            <a:ext cx="944016" cy="145267"/>
+          </a:xfrm>
+          <a:prstGeom prst="roundRect">
+            <a:avLst>
+              <a:gd name="adj" fmla="val 0"/>
+            </a:avLst>
+          </a:prstGeom>
+          <a:solidFill>
+            <a:srgbClr val="91AEFF">
+              <a:alpha val="32941"/>
+            </a:srgbClr>
+          </a:solidFill>
+          <a:ln w="6350">
+            <a:solidFill>
+              <a:schemeClr val="tx1">
+                <a:lumMod val="50000"/>
+                <a:lumOff val="50000"/>
+              </a:schemeClr>
+            </a:solidFill>
+            <a:prstDash val="solid"/>
+          </a:ln>
+        </p:spPr>
+        <p:style>
+          <a:lnRef idx="2">
+            <a:schemeClr val="accent1">
+              <a:shade val="15000"/>
+            </a:schemeClr>
+          </a:lnRef>
+          <a:fillRef idx="1">
+            <a:schemeClr val="accent1"/>
+          </a:fillRef>
+          <a:effectRef idx="0">
+            <a:schemeClr val="accent1"/>
+          </a:effectRef>
+          <a:fontRef idx="minor">
+            <a:schemeClr val="lt1"/>
+          </a:fontRef>
+        </p:style>
+        <p:txBody>
+          <a:bodyPr rtlCol="0" anchor="ctr"/>
+          <a:lstStyle/>
+          <a:p>
+            <a:pPr algn="ctr"/>
+            <a:r>
+              <a:rPr lang="en-US" sz="600" b="1" dirty="0">
+                <a:solidFill>
+                  <a:schemeClr val="tx1"/>
+                </a:solidFill>
+                <a:latin typeface="NewComputerModern08" pitchFamily="2" charset="77"/>
+                <a:cs typeface="Times New Roman" panose="02020603050405020304" pitchFamily="18" charset="0"/>
+              </a:rPr>
+              <a:t>Output</a:t>
+            </a:r>
+            <a:endParaRPr lang="en-US" sz="1400" b="1" dirty="0">
+              <a:solidFill>
+                <a:schemeClr val="tx1"/>
+              </a:solidFill>
+            </a:endParaRPr>
+          </a:p>
+        </p:txBody>
+      </p:sp>
+      <p:sp>
+        <p:nvSpPr>
+          <p:cNvPr id="220" name="Rounded Rectangle 219">
+            <a:extLst>
+              <a:ext uri="{FF2B5EF4-FFF2-40B4-BE49-F238E27FC236}">
+                <a16:creationId xmlns:a16="http://schemas.microsoft.com/office/drawing/2014/main" id="{42163F6E-6C14-1A32-4F50-E1EDBB6FC428}"/>
+              </a:ext>
+            </a:extLst>
+          </p:cNvPr>
+          <p:cNvSpPr/>
+          <p:nvPr/>
+        </p:nvSpPr>
+        <p:spPr>
+          <a:xfrm>
+            <a:off x="1308009" y="5263885"/>
+            <a:ext cx="944016" cy="221484"/>
+          </a:xfrm>
+          <a:prstGeom prst="roundRect">
+            <a:avLst>
+              <a:gd name="adj" fmla="val 0"/>
+            </a:avLst>
+          </a:prstGeom>
+          <a:noFill/>
+          <a:ln w="6350">
+            <a:solidFill>
+              <a:schemeClr val="tx1">
+                <a:lumMod val="50000"/>
+                <a:lumOff val="50000"/>
+              </a:schemeClr>
+            </a:solidFill>
+            <a:prstDash val="solid"/>
+          </a:ln>
+        </p:spPr>
+        <p:style>
+          <a:lnRef idx="2">
+            <a:schemeClr val="accent1">
+              <a:shade val="15000"/>
+            </a:schemeClr>
+          </a:lnRef>
+          <a:fillRef idx="1">
+            <a:schemeClr val="accent1"/>
+          </a:fillRef>
+          <a:effectRef idx="0">
+            <a:schemeClr val="accent1"/>
+          </a:effectRef>
+          <a:fontRef idx="minor">
+            <a:schemeClr val="lt1"/>
+          </a:fontRef>
+        </p:style>
+        <p:txBody>
+          <a:bodyPr rtlCol="0" anchor="ctr"/>
+          <a:lstStyle/>
+          <a:p>
+            <a:pPr algn="ctr"/>
+            <a:r>
+              <a:rPr lang="en-US" sz="600" dirty="0">
+                <a:solidFill>
+                  <a:schemeClr val="tx1"/>
+                </a:solidFill>
+                <a:latin typeface="NewComputerModern08" pitchFamily="2" charset="77"/>
+                <a:cs typeface="Times New Roman" panose="02020603050405020304" pitchFamily="18" charset="0"/>
+              </a:rPr>
+              <a:t>Receipt valid/invalid</a:t>
+            </a:r>
+          </a:p>
+        </p:txBody>
+      </p:sp>
+      <p:cxnSp>
+        <p:nvCxnSpPr>
+          <p:cNvPr id="221" name="Straight Arrow Connector 220">
+            <a:extLst>
+              <a:ext uri="{FF2B5EF4-FFF2-40B4-BE49-F238E27FC236}">
+                <a16:creationId xmlns:a16="http://schemas.microsoft.com/office/drawing/2014/main" id="{C884140C-0DDB-6435-20A2-2094C3E658C7}"/>
+              </a:ext>
+            </a:extLst>
+          </p:cNvPr>
+          <p:cNvCxnSpPr>
+            <a:cxnSpLocks/>
+            <a:stCxn id="218" idx="2"/>
+            <a:endCxn id="219" idx="0"/>
+          </p:cNvCxnSpPr>
+          <p:nvPr/>
+        </p:nvCxnSpPr>
+        <p:spPr>
+          <a:xfrm flipH="1">
+            <a:off x="1780018" y="4887540"/>
+            <a:ext cx="567" cy="231077"/>
+          </a:xfrm>
+          <a:prstGeom prst="straightConnector1">
+            <a:avLst/>
+          </a:prstGeom>
+          <a:ln w="9525">
+            <a:solidFill>
+              <a:schemeClr val="tx1">
+                <a:lumMod val="65000"/>
+                <a:lumOff val="35000"/>
+              </a:schemeClr>
+            </a:solidFill>
+            <a:tailEnd type="triangle" w="sm" len="med"/>
+          </a:ln>
+        </p:spPr>
+        <p:style>
+          <a:lnRef idx="2">
+            <a:schemeClr val="accent1"/>
+          </a:lnRef>
+          <a:fillRef idx="0">
+            <a:schemeClr val="accent1"/>
+          </a:fillRef>
+          <a:effectRef idx="1">
+            <a:schemeClr val="accent1"/>
+          </a:effectRef>
+          <a:fontRef idx="minor">
+            <a:schemeClr val="tx1"/>
+          </a:fontRef>
+        </p:style>
+      </p:cxnSp>
+      <p:cxnSp>
+        <p:nvCxnSpPr>
+          <p:cNvPr id="223" name="Straight Arrow Connector 222">
+            <a:extLst>
+              <a:ext uri="{FF2B5EF4-FFF2-40B4-BE49-F238E27FC236}">
+                <a16:creationId xmlns:a16="http://schemas.microsoft.com/office/drawing/2014/main" id="{41A4298A-BE1E-5BE9-0023-DAEAC1D5A7BF}"/>
+              </a:ext>
+            </a:extLst>
+          </p:cNvPr>
+          <p:cNvCxnSpPr>
+            <a:cxnSpLocks/>
+          </p:cNvCxnSpPr>
+          <p:nvPr/>
+        </p:nvCxnSpPr>
+        <p:spPr>
+          <a:xfrm>
+            <a:off x="188633" y="3485308"/>
+            <a:ext cx="0" cy="477797"/>
+          </a:xfrm>
+          <a:prstGeom prst="straightConnector1">
+            <a:avLst/>
+          </a:prstGeom>
+          <a:ln w="9525">
+            <a:solidFill>
+              <a:schemeClr val="tx1">
+                <a:lumMod val="65000"/>
+                <a:lumOff val="35000"/>
+              </a:schemeClr>
+            </a:solidFill>
+            <a:tailEnd type="triangle" w="sm" len="med"/>
+          </a:ln>
+        </p:spPr>
+        <p:style>
+          <a:lnRef idx="2">
+            <a:schemeClr val="accent1"/>
+          </a:lnRef>
+          <a:fillRef idx="0">
+            <a:schemeClr val="accent1"/>
+          </a:fillRef>
+          <a:effectRef idx="1">
+            <a:schemeClr val="accent1"/>
+          </a:effectRef>
+          <a:fontRef idx="minor">
+            <a:schemeClr val="tx1"/>
+          </a:fontRef>
+        </p:style>
+      </p:cxnSp>
+      <p:cxnSp>
+        <p:nvCxnSpPr>
+          <p:cNvPr id="225" name="Straight Arrow Connector 224">
+            <a:extLst>
+              <a:ext uri="{FF2B5EF4-FFF2-40B4-BE49-F238E27FC236}">
+                <a16:creationId xmlns:a16="http://schemas.microsoft.com/office/drawing/2014/main" id="{0502971D-2D18-FA89-E0FA-45D23466333D}"/>
+              </a:ext>
+            </a:extLst>
+          </p:cNvPr>
+          <p:cNvCxnSpPr>
+            <a:cxnSpLocks/>
+          </p:cNvCxnSpPr>
+          <p:nvPr/>
+        </p:nvCxnSpPr>
+        <p:spPr>
+          <a:xfrm>
+            <a:off x="1795246" y="4131865"/>
+            <a:ext cx="0" cy="201088"/>
+          </a:xfrm>
+          <a:prstGeom prst="straightConnector1">
+            <a:avLst/>
+          </a:prstGeom>
+          <a:ln w="9525">
+            <a:solidFill>
+              <a:schemeClr val="tx1">
+                <a:lumMod val="65000"/>
+                <a:lumOff val="35000"/>
+              </a:schemeClr>
+            </a:solidFill>
+            <a:tailEnd type="triangle" w="sm" len="med"/>
+          </a:ln>
+        </p:spPr>
+        <p:style>
+          <a:lnRef idx="2">
+            <a:schemeClr val="accent1"/>
+          </a:lnRef>
+          <a:fillRef idx="0">
+            <a:schemeClr val="accent1"/>
+          </a:fillRef>
+          <a:effectRef idx="1">
+            <a:schemeClr val="accent1"/>
+          </a:effectRef>
+          <a:fontRef idx="minor">
+            <a:schemeClr val="tx1"/>
+          </a:fontRef>
+        </p:style>
+      </p:cxnSp>
+      <p:cxnSp>
+        <p:nvCxnSpPr>
+          <p:cNvPr id="226" name="Straight Arrow Connector 225">
+            <a:extLst>
+              <a:ext uri="{FF2B5EF4-FFF2-40B4-BE49-F238E27FC236}">
+                <a16:creationId xmlns:a16="http://schemas.microsoft.com/office/drawing/2014/main" id="{6C0FBA80-38F8-8581-AB93-7589F6B11F27}"/>
+              </a:ext>
+            </a:extLst>
+          </p:cNvPr>
+          <p:cNvCxnSpPr>
+            <a:cxnSpLocks/>
+          </p:cNvCxnSpPr>
+          <p:nvPr/>
+        </p:nvCxnSpPr>
+        <p:spPr>
+          <a:xfrm flipH="1">
+            <a:off x="1798301" y="4131865"/>
+            <a:ext cx="897767" cy="0"/>
+          </a:xfrm>
+          <a:prstGeom prst="straightConnector1">
+            <a:avLst/>
+          </a:prstGeom>
+          <a:ln w="9525">
+            <a:solidFill>
+              <a:schemeClr val="tx1">
+                <a:lumMod val="65000"/>
+                <a:lumOff val="35000"/>
+              </a:schemeClr>
+            </a:solidFill>
+            <a:tailEnd type="none" w="sm" len="med"/>
+          </a:ln>
+        </p:spPr>
+        <p:style>
+          <a:lnRef idx="2">
+            <a:schemeClr val="accent1"/>
+          </a:lnRef>
+          <a:fillRef idx="0">
+            <a:schemeClr val="accent1"/>
+          </a:fillRef>
+          <a:effectRef idx="1">
+            <a:schemeClr val="accent1"/>
+          </a:effectRef>
+          <a:fontRef idx="minor">
+            <a:schemeClr val="tx1"/>
+          </a:fontRef>
+        </p:style>
+      </p:cxnSp>
+      <p:cxnSp>
+        <p:nvCxnSpPr>
+          <p:cNvPr id="228" name="Straight Arrow Connector 227">
+            <a:extLst>
+              <a:ext uri="{FF2B5EF4-FFF2-40B4-BE49-F238E27FC236}">
+                <a16:creationId xmlns:a16="http://schemas.microsoft.com/office/drawing/2014/main" id="{DB3323D8-1F7F-CB00-1328-1700E1E1C3A0}"/>
+              </a:ext>
+            </a:extLst>
+          </p:cNvPr>
+          <p:cNvCxnSpPr>
+            <a:cxnSpLocks/>
+          </p:cNvCxnSpPr>
+          <p:nvPr/>
+        </p:nvCxnSpPr>
+        <p:spPr>
+          <a:xfrm flipH="1">
+            <a:off x="1129476" y="4059572"/>
+            <a:ext cx="1558540" cy="0"/>
+          </a:xfrm>
+          <a:prstGeom prst="straightConnector1">
+            <a:avLst/>
+          </a:prstGeom>
+          <a:ln w="9525">
+            <a:solidFill>
+              <a:schemeClr val="tx1">
+                <a:lumMod val="65000"/>
+                <a:lumOff val="35000"/>
+              </a:schemeClr>
+            </a:solidFill>
+            <a:tailEnd type="triangle" w="sm" len="med"/>
+          </a:ln>
+        </p:spPr>
+        <p:style>
+          <a:lnRef idx="2">
+            <a:schemeClr val="accent1"/>
+          </a:lnRef>
+          <a:fillRef idx="0">
+            <a:schemeClr val="accent1"/>
+          </a:fillRef>
+          <a:effectRef idx="1">
+            <a:schemeClr val="accent1"/>
+          </a:effectRef>
+          <a:fontRef idx="minor">
+            <a:schemeClr val="tx1"/>
+          </a:fontRef>
+        </p:style>
+      </p:cxnSp>
+      <p:sp>
+        <p:nvSpPr>
+          <p:cNvPr id="231" name="TextBox 230">
+            <a:extLst>
+              <a:ext uri="{FF2B5EF4-FFF2-40B4-BE49-F238E27FC236}">
+                <a16:creationId xmlns:a16="http://schemas.microsoft.com/office/drawing/2014/main" id="{22656143-7008-8576-7DE8-B7E81DD0B91B}"/>
+              </a:ext>
+            </a:extLst>
+          </p:cNvPr>
+          <p:cNvSpPr txBox="1"/>
+          <p:nvPr/>
+        </p:nvSpPr>
+        <p:spPr>
+          <a:xfrm>
+            <a:off x="211724" y="5905465"/>
+            <a:ext cx="1991392" cy="184666"/>
+          </a:xfrm>
+          <a:prstGeom prst="rect">
+            <a:avLst/>
+          </a:prstGeom>
+          <a:solidFill>
+            <a:schemeClr val="bg1"/>
+          </a:solidFill>
+          <a:ln w="3175">
+            <a:solidFill>
+              <a:schemeClr val="tx1"/>
+            </a:solidFill>
+          </a:ln>
+        </p:spPr>
+        <p:txBody>
+          <a:bodyPr wrap="square" rtlCol="0">
+            <a:spAutoFit/>
+          </a:bodyPr>
+          <a:lstStyle/>
+          <a:p>
+            <a:r>
+              <a:rPr lang="en-US" sz="600" dirty="0">
+                <a:latin typeface="NewComputerModern08" pitchFamily="2" charset="77"/>
+                <a:cs typeface="Times New Roman" panose="02020603050405020304" pitchFamily="18" charset="0"/>
+              </a:rPr>
+              <a:t>Voter checks if dispute code is included in tally</a:t>
+            </a:r>
+          </a:p>
+        </p:txBody>
+      </p:sp>
+      <p:cxnSp>
+        <p:nvCxnSpPr>
+          <p:cNvPr id="232" name="Straight Arrow Connector 231">
+            <a:extLst>
+              <a:ext uri="{FF2B5EF4-FFF2-40B4-BE49-F238E27FC236}">
+                <a16:creationId xmlns:a16="http://schemas.microsoft.com/office/drawing/2014/main" id="{1831581E-80EE-3ABF-CFB3-A8BFBAABAFE2}"/>
+              </a:ext>
+            </a:extLst>
+          </p:cNvPr>
+          <p:cNvCxnSpPr>
+            <a:cxnSpLocks/>
+          </p:cNvCxnSpPr>
+          <p:nvPr/>
+        </p:nvCxnSpPr>
+        <p:spPr>
+          <a:xfrm>
+            <a:off x="2953670" y="5720413"/>
+            <a:ext cx="0" cy="277385"/>
+          </a:xfrm>
+          <a:prstGeom prst="straightConnector1">
+            <a:avLst/>
+          </a:prstGeom>
+          <a:ln w="9525">
+            <a:solidFill>
+              <a:schemeClr val="tx1">
+                <a:lumMod val="65000"/>
+                <a:lumOff val="35000"/>
+              </a:schemeClr>
+            </a:solidFill>
+            <a:tailEnd type="none" w="sm" len="med"/>
+          </a:ln>
+        </p:spPr>
+        <p:style>
+          <a:lnRef idx="2">
+            <a:schemeClr val="accent1"/>
+          </a:lnRef>
+          <a:fillRef idx="0">
+            <a:schemeClr val="accent1"/>
+          </a:fillRef>
+          <a:effectRef idx="1">
+            <a:schemeClr val="accent1"/>
+          </a:effectRef>
+          <a:fontRef idx="minor">
+            <a:schemeClr val="tx1"/>
+          </a:fontRef>
+        </p:style>
+      </p:cxnSp>
+      <p:cxnSp>
+        <p:nvCxnSpPr>
+          <p:cNvPr id="236" name="Straight Arrow Connector 235">
+            <a:extLst>
+              <a:ext uri="{FF2B5EF4-FFF2-40B4-BE49-F238E27FC236}">
+                <a16:creationId xmlns:a16="http://schemas.microsoft.com/office/drawing/2014/main" id="{94B4B4D6-7842-32BF-680F-C2EE23AC8876}"/>
+              </a:ext>
+            </a:extLst>
+          </p:cNvPr>
+          <p:cNvCxnSpPr>
+            <a:cxnSpLocks/>
+            <a:stCxn id="231" idx="2"/>
+            <a:endCxn id="204" idx="0"/>
+          </p:cNvCxnSpPr>
+          <p:nvPr/>
+        </p:nvCxnSpPr>
+        <p:spPr>
+          <a:xfrm flipH="1">
+            <a:off x="1202132" y="6090131"/>
+            <a:ext cx="5288" cy="342486"/>
+          </a:xfrm>
+          <a:prstGeom prst="straightConnector1">
+            <a:avLst/>
+          </a:prstGeom>
+          <a:ln w="9525">
+            <a:solidFill>
+              <a:schemeClr val="tx1">
+                <a:lumMod val="65000"/>
+                <a:lumOff val="35000"/>
+              </a:schemeClr>
+            </a:solidFill>
+            <a:tailEnd type="triangle" w="sm" len="med"/>
+          </a:ln>
+        </p:spPr>
+        <p:style>
+          <a:lnRef idx="2">
+            <a:schemeClr val="accent1"/>
+          </a:lnRef>
+          <a:fillRef idx="0">
+            <a:schemeClr val="accent1"/>
+          </a:fillRef>
+          <a:effectRef idx="1">
+            <a:schemeClr val="accent1"/>
+          </a:effectRef>
+          <a:fontRef idx="minor">
+            <a:schemeClr val="tx1"/>
+          </a:fontRef>
+        </p:style>
+      </p:cxnSp>
+      <p:cxnSp>
+        <p:nvCxnSpPr>
+          <p:cNvPr id="238" name="Straight Arrow Connector 237">
+            <a:extLst>
+              <a:ext uri="{FF2B5EF4-FFF2-40B4-BE49-F238E27FC236}">
+                <a16:creationId xmlns:a16="http://schemas.microsoft.com/office/drawing/2014/main" id="{597A8708-5B47-7840-B8CD-B60F4A043609}"/>
+              </a:ext>
+            </a:extLst>
+          </p:cNvPr>
+          <p:cNvCxnSpPr>
+            <a:cxnSpLocks/>
+            <a:endCxn id="231" idx="3"/>
+          </p:cNvCxnSpPr>
+          <p:nvPr/>
+        </p:nvCxnSpPr>
+        <p:spPr>
+          <a:xfrm flipH="1">
+            <a:off x="2203116" y="5997798"/>
+            <a:ext cx="752761" cy="0"/>
+          </a:xfrm>
+          <a:prstGeom prst="straightConnector1">
+            <a:avLst/>
+          </a:prstGeom>
+          <a:ln w="9525">
+            <a:solidFill>
+              <a:schemeClr val="tx1">
+                <a:lumMod val="65000"/>
+                <a:lumOff val="35000"/>
+              </a:schemeClr>
+            </a:solidFill>
+            <a:tailEnd type="triangle" w="sm" len="med"/>
+          </a:ln>
+        </p:spPr>
+        <p:style>
+          <a:lnRef idx="2">
+            <a:schemeClr val="accent1"/>
+          </a:lnRef>
+          <a:fillRef idx="0">
+            <a:schemeClr val="accent1"/>
+          </a:fillRef>
+          <a:effectRef idx="1">
+            <a:schemeClr val="accent1"/>
+          </a:effectRef>
+          <a:fontRef idx="minor">
+            <a:schemeClr val="tx1"/>
+          </a:fontRef>
+        </p:style>
+      </p:cxnSp>
     </p:spTree>
     <p:extLst>
       <p:ext uri="{BB962C8B-B14F-4D97-AF65-F5344CB8AC3E}">

--- a/2026 WTSC/figures/protocol.pptx
+++ b/2026 WTSC/figures/protocol.pptx
@@ -259,7 +259,7 @@
           <a:p>
             <a:fld id="{32E81E37-94EE-7241-9339-AD18A17806B9}" type="datetimeFigureOut">
               <a:rPr lang="en-US" smtClean="0"/>
-              <a:t>1/30/26</a:t>
+              <a:t>3/11/26</a:t>
             </a:fld>
             <a:endParaRPr lang="en-US"/>
           </a:p>
@@ -457,7 +457,7 @@
           <a:p>
             <a:fld id="{32E81E37-94EE-7241-9339-AD18A17806B9}" type="datetimeFigureOut">
               <a:rPr lang="en-US" smtClean="0"/>
-              <a:t>1/30/26</a:t>
+              <a:t>3/11/26</a:t>
             </a:fld>
             <a:endParaRPr lang="en-US"/>
           </a:p>
@@ -665,7 +665,7 @@
           <a:p>
             <a:fld id="{32E81E37-94EE-7241-9339-AD18A17806B9}" type="datetimeFigureOut">
               <a:rPr lang="en-US" smtClean="0"/>
-              <a:t>1/30/26</a:t>
+              <a:t>3/11/26</a:t>
             </a:fld>
             <a:endParaRPr lang="en-US"/>
           </a:p>
@@ -863,7 +863,7 @@
           <a:p>
             <a:fld id="{32E81E37-94EE-7241-9339-AD18A17806B9}" type="datetimeFigureOut">
               <a:rPr lang="en-US" smtClean="0"/>
-              <a:t>1/30/26</a:t>
+              <a:t>3/11/26</a:t>
             </a:fld>
             <a:endParaRPr lang="en-US"/>
           </a:p>
@@ -1138,7 +1138,7 @@
           <a:p>
             <a:fld id="{32E81E37-94EE-7241-9339-AD18A17806B9}" type="datetimeFigureOut">
               <a:rPr lang="en-US" smtClean="0"/>
-              <a:t>1/30/26</a:t>
+              <a:t>3/11/26</a:t>
             </a:fld>
             <a:endParaRPr lang="en-US"/>
           </a:p>
@@ -1403,7 +1403,7 @@
           <a:p>
             <a:fld id="{32E81E37-94EE-7241-9339-AD18A17806B9}" type="datetimeFigureOut">
               <a:rPr lang="en-US" smtClean="0"/>
-              <a:t>1/30/26</a:t>
+              <a:t>3/11/26</a:t>
             </a:fld>
             <a:endParaRPr lang="en-US"/>
           </a:p>
@@ -1815,7 +1815,7 @@
           <a:p>
             <a:fld id="{32E81E37-94EE-7241-9339-AD18A17806B9}" type="datetimeFigureOut">
               <a:rPr lang="en-US" smtClean="0"/>
-              <a:t>1/30/26</a:t>
+              <a:t>3/11/26</a:t>
             </a:fld>
             <a:endParaRPr lang="en-US"/>
           </a:p>
@@ -1956,7 +1956,7 @@
           <a:p>
             <a:fld id="{32E81E37-94EE-7241-9339-AD18A17806B9}" type="datetimeFigureOut">
               <a:rPr lang="en-US" smtClean="0"/>
-              <a:t>1/30/26</a:t>
+              <a:t>3/11/26</a:t>
             </a:fld>
             <a:endParaRPr lang="en-US"/>
           </a:p>
@@ -2069,7 +2069,7 @@
           <a:p>
             <a:fld id="{32E81E37-94EE-7241-9339-AD18A17806B9}" type="datetimeFigureOut">
               <a:rPr lang="en-US" smtClean="0"/>
-              <a:t>1/30/26</a:t>
+              <a:t>3/11/26</a:t>
             </a:fld>
             <a:endParaRPr lang="en-US"/>
           </a:p>
@@ -2380,7 +2380,7 @@
           <a:p>
             <a:fld id="{32E81E37-94EE-7241-9339-AD18A17806B9}" type="datetimeFigureOut">
               <a:rPr lang="en-US" smtClean="0"/>
-              <a:t>1/30/26</a:t>
+              <a:t>3/11/26</a:t>
             </a:fld>
             <a:endParaRPr lang="en-US"/>
           </a:p>
@@ -2668,7 +2668,7 @@
           <a:p>
             <a:fld id="{32E81E37-94EE-7241-9339-AD18A17806B9}" type="datetimeFigureOut">
               <a:rPr lang="en-US" smtClean="0"/>
-              <a:t>1/30/26</a:t>
+              <a:t>3/11/26</a:t>
             </a:fld>
             <a:endParaRPr lang="en-US"/>
           </a:p>
@@ -2909,7 +2909,7 @@
           <a:p>
             <a:fld id="{32E81E37-94EE-7241-9339-AD18A17806B9}" type="datetimeFigureOut">
               <a:rPr lang="en-US" smtClean="0"/>
-              <a:t>1/30/26</a:t>
+              <a:t>3/11/26</a:t>
             </a:fld>
             <a:endParaRPr lang="en-US"/>
           </a:p>
@@ -6184,21 +6184,35 @@
                 <a:latin typeface="NewComputerModern08" pitchFamily="2" charset="77"/>
                 <a:cs typeface="Times New Roman" panose="02020603050405020304" pitchFamily="18" charset="0"/>
               </a:rPr>
-              <a:t> call </a:t>
-            </a:r>
-            <a:r>
-              <a:rPr lang="en-US" sz="600" dirty="0" err="1">
+              <a:t> </a:t>
+            </a:r>
+            <a:r>
+              <a:rPr lang="en-US" sz="600">
                 <a:latin typeface="NewComputerModern08" pitchFamily="2" charset="77"/>
                 <a:cs typeface="Times New Roman" panose="02020603050405020304" pitchFamily="18" charset="0"/>
               </a:rPr>
-              <a:t>cata</a:t>
+              <a:t>call </a:t>
             </a:r>
             <a:r>
               <a:rPr lang="en-US" sz="600" dirty="0">
                 <a:latin typeface="NewComputerModern08" pitchFamily="2" charset="77"/>
                 <a:cs typeface="Times New Roman" panose="02020603050405020304" pitchFamily="18" charset="0"/>
               </a:rPr>
-              <a:t> to </a:t>
+              <a:t>d</a:t>
+            </a:r>
+            <a:r>
+              <a:rPr lang="en-US" sz="600">
+                <a:latin typeface="NewComputerModern08" pitchFamily="2" charset="77"/>
+                <a:cs typeface="Times New Roman" panose="02020603050405020304" pitchFamily="18" charset="0"/>
+              </a:rPr>
+              <a:t>ata </a:t>
+            </a:r>
+            <a:r>
+              <a:rPr lang="en-US" sz="600" dirty="0">
+                <a:latin typeface="NewComputerModern08" pitchFamily="2" charset="77"/>
+                <a:cs typeface="Times New Roman" panose="02020603050405020304" pitchFamily="18" charset="0"/>
+              </a:rPr>
+              <a:t>to </a:t>
             </a:r>
             <a:r>
               <a:rPr lang="en-US" sz="600" dirty="0" err="1">
@@ -6990,7 +7004,7 @@
                 <a:latin typeface="NewComputerModern08" pitchFamily="2" charset="77"/>
                 <a:cs typeface="Times New Roman" panose="02020603050405020304" pitchFamily="18" charset="0"/>
               </a:rPr>
-              <a:t>2. EA performs KZG opening of Ballot id in permutated tables</a:t>
+              <a:t>2. EA performs KZG opening of Ballot id in permuted tables</a:t>
             </a:r>
           </a:p>
           <a:p>

--- a/2026 WTSC/figures/protocol.pptx
+++ b/2026 WTSC/figures/protocol.pptx
@@ -259,7 +259,7 @@
           <a:p>
             <a:fld id="{32E81E37-94EE-7241-9339-AD18A17806B9}" type="datetimeFigureOut">
               <a:rPr lang="en-US" smtClean="0"/>
-              <a:t>3/11/26</a:t>
+              <a:t>1/30/26</a:t>
             </a:fld>
             <a:endParaRPr lang="en-US"/>
           </a:p>
@@ -457,7 +457,7 @@
           <a:p>
             <a:fld id="{32E81E37-94EE-7241-9339-AD18A17806B9}" type="datetimeFigureOut">
               <a:rPr lang="en-US" smtClean="0"/>
-              <a:t>3/11/26</a:t>
+              <a:t>1/30/26</a:t>
             </a:fld>
             <a:endParaRPr lang="en-US"/>
           </a:p>
@@ -665,7 +665,7 @@
           <a:p>
             <a:fld id="{32E81E37-94EE-7241-9339-AD18A17806B9}" type="datetimeFigureOut">
               <a:rPr lang="en-US" smtClean="0"/>
-              <a:t>3/11/26</a:t>
+              <a:t>1/30/26</a:t>
             </a:fld>
             <a:endParaRPr lang="en-US"/>
           </a:p>
@@ -863,7 +863,7 @@
           <a:p>
             <a:fld id="{32E81E37-94EE-7241-9339-AD18A17806B9}" type="datetimeFigureOut">
               <a:rPr lang="en-US" smtClean="0"/>
-              <a:t>3/11/26</a:t>
+              <a:t>1/30/26</a:t>
             </a:fld>
             <a:endParaRPr lang="en-US"/>
           </a:p>
@@ -1138,7 +1138,7 @@
           <a:p>
             <a:fld id="{32E81E37-94EE-7241-9339-AD18A17806B9}" type="datetimeFigureOut">
               <a:rPr lang="en-US" smtClean="0"/>
-              <a:t>3/11/26</a:t>
+              <a:t>1/30/26</a:t>
             </a:fld>
             <a:endParaRPr lang="en-US"/>
           </a:p>
@@ -1403,7 +1403,7 @@
           <a:p>
             <a:fld id="{32E81E37-94EE-7241-9339-AD18A17806B9}" type="datetimeFigureOut">
               <a:rPr lang="en-US" smtClean="0"/>
-              <a:t>3/11/26</a:t>
+              <a:t>1/30/26</a:t>
             </a:fld>
             <a:endParaRPr lang="en-US"/>
           </a:p>
@@ -1815,7 +1815,7 @@
           <a:p>
             <a:fld id="{32E81E37-94EE-7241-9339-AD18A17806B9}" type="datetimeFigureOut">
               <a:rPr lang="en-US" smtClean="0"/>
-              <a:t>3/11/26</a:t>
+              <a:t>1/30/26</a:t>
             </a:fld>
             <a:endParaRPr lang="en-US"/>
           </a:p>
@@ -1956,7 +1956,7 @@
           <a:p>
             <a:fld id="{32E81E37-94EE-7241-9339-AD18A17806B9}" type="datetimeFigureOut">
               <a:rPr lang="en-US" smtClean="0"/>
-              <a:t>3/11/26</a:t>
+              <a:t>1/30/26</a:t>
             </a:fld>
             <a:endParaRPr lang="en-US"/>
           </a:p>
@@ -2069,7 +2069,7 @@
           <a:p>
             <a:fld id="{32E81E37-94EE-7241-9339-AD18A17806B9}" type="datetimeFigureOut">
               <a:rPr lang="en-US" smtClean="0"/>
-              <a:t>3/11/26</a:t>
+              <a:t>1/30/26</a:t>
             </a:fld>
             <a:endParaRPr lang="en-US"/>
           </a:p>
@@ -2380,7 +2380,7 @@
           <a:p>
             <a:fld id="{32E81E37-94EE-7241-9339-AD18A17806B9}" type="datetimeFigureOut">
               <a:rPr lang="en-US" smtClean="0"/>
-              <a:t>3/11/26</a:t>
+              <a:t>1/30/26</a:t>
             </a:fld>
             <a:endParaRPr lang="en-US"/>
           </a:p>
@@ -2668,7 +2668,7 @@
           <a:p>
             <a:fld id="{32E81E37-94EE-7241-9339-AD18A17806B9}" type="datetimeFigureOut">
               <a:rPr lang="en-US" smtClean="0"/>
-              <a:t>3/11/26</a:t>
+              <a:t>1/30/26</a:t>
             </a:fld>
             <a:endParaRPr lang="en-US"/>
           </a:p>
@@ -2909,7 +2909,7 @@
           <a:p>
             <a:fld id="{32E81E37-94EE-7241-9339-AD18A17806B9}" type="datetimeFigureOut">
               <a:rPr lang="en-US" smtClean="0"/>
-              <a:t>3/11/26</a:t>
+              <a:t>1/30/26</a:t>
             </a:fld>
             <a:endParaRPr lang="en-US"/>
           </a:p>
@@ -6184,35 +6184,21 @@
                 <a:latin typeface="NewComputerModern08" pitchFamily="2" charset="77"/>
                 <a:cs typeface="Times New Roman" panose="02020603050405020304" pitchFamily="18" charset="0"/>
               </a:rPr>
-              <a:t> </a:t>
-            </a:r>
-            <a:r>
-              <a:rPr lang="en-US" sz="600">
+              <a:t> call </a:t>
+            </a:r>
+            <a:r>
+              <a:rPr lang="en-US" sz="600" dirty="0" err="1">
                 <a:latin typeface="NewComputerModern08" pitchFamily="2" charset="77"/>
                 <a:cs typeface="Times New Roman" panose="02020603050405020304" pitchFamily="18" charset="0"/>
               </a:rPr>
-              <a:t>call </a:t>
+              <a:t>cata</a:t>
             </a:r>
             <a:r>
               <a:rPr lang="en-US" sz="600" dirty="0">
                 <a:latin typeface="NewComputerModern08" pitchFamily="2" charset="77"/>
                 <a:cs typeface="Times New Roman" panose="02020603050405020304" pitchFamily="18" charset="0"/>
               </a:rPr>
-              <a:t>d</a:t>
-            </a:r>
-            <a:r>
-              <a:rPr lang="en-US" sz="600">
-                <a:latin typeface="NewComputerModern08" pitchFamily="2" charset="77"/>
-                <a:cs typeface="Times New Roman" panose="02020603050405020304" pitchFamily="18" charset="0"/>
-              </a:rPr>
-              <a:t>ata </a:t>
-            </a:r>
-            <a:r>
-              <a:rPr lang="en-US" sz="600" dirty="0">
-                <a:latin typeface="NewComputerModern08" pitchFamily="2" charset="77"/>
-                <a:cs typeface="Times New Roman" panose="02020603050405020304" pitchFamily="18" charset="0"/>
-              </a:rPr>
-              <a:t>to </a:t>
+              <a:t> to </a:t>
             </a:r>
             <a:r>
               <a:rPr lang="en-US" sz="600" dirty="0" err="1">
@@ -7004,7 +6990,7 @@
                 <a:latin typeface="NewComputerModern08" pitchFamily="2" charset="77"/>
                 <a:cs typeface="Times New Roman" panose="02020603050405020304" pitchFamily="18" charset="0"/>
               </a:rPr>
-              <a:t>2. EA performs KZG opening of Ballot id in permuted tables</a:t>
+              <a:t>2. EA performs KZG opening of Ballot id in permutated tables</a:t>
             </a:r>
           </a:p>
           <a:p>
